--- a/lessons/lesson-16/slides.pptx
+++ b/lessons/lesson-16/slides.pptx
@@ -409,7 +409,7 @@
           </a:p>
           <a:p xmlns:a="http://schemas.openxmlformats.org/drawingml/2006/main">
             <a:r>
-              <a:t>讲义位置：本课讲义；见逐页母稿映射表</a:t>
+              <a:t>讲述与校准：</a:t>
             </a:r>
           </a:p>
           <a:p xmlns:a="http://schemas.openxmlformats.org/drawingml/2006/main">
@@ -419,27 +419,17 @@
           </a:p>
           <a:p xmlns:a="http://schemas.openxmlformats.org/drawingml/2006/main">
             <a:r>
-              <a:t>屏显核对：</a:t>
-            </a:r>
-          </a:p>
-          <a:p xmlns:a="http://schemas.openxmlformats.org/drawingml/2006/main">
-            <a:r>
-              <a:t>第16讲 最终分享、论证门与项目提交</a:t>
-            </a:r>
-          </a:p>
-          <a:p xmlns:a="http://schemas.openxmlformats.org/drawingml/2006/main">
-            <a:r>
               <a:t/>
             </a:r>
           </a:p>
           <a:p xmlns:a="http://schemas.openxmlformats.org/drawingml/2006/main">
             <a:r>
-              <a:t>教师讲述：</a:t>
-            </a:r>
-          </a:p>
-          <a:p xmlns:a="http://schemas.openxmlformats.org/drawingml/2006/main">
-            <a:r>
-              <a:t>本课没有新方法讲授。学生打开闪电页和项目材料。</a:t>
+              <a:t>学生动作：</a:t>
+            </a:r>
+          </a:p>
+          <a:p xmlns:a="http://schemas.openxmlformats.org/drawingml/2006/main">
+            <a:r>
+              <a:t>依据本页方法检查本人项目；按需参考。</a:t>
             </a:r>
           </a:p>
           <a:p xmlns:a="http://schemas.openxmlformats.org/drawingml/2006/main">
@@ -449,7 +439,7 @@
           </a:p>
           <a:p xmlns:a="http://schemas.openxmlformats.org/drawingml/2006/main">
             <a:r>
-              <a:t>学生动作：</a:t>
+              <a:t>课堂安排：按 teaching-plan.md 专用课堂时段安排；换场计入对应时段。</a:t>
             </a:r>
           </a:p>
           <a:p xmlns:a="http://schemas.openxmlformats.org/drawingml/2006/main">
@@ -459,52 +449,12 @@
           </a:p>
           <a:p xmlns:a="http://schemas.openxmlformats.org/drawingml/2006/main">
             <a:r>
-              <a:t/>
-            </a:r>
-          </a:p>
-          <a:p xmlns:a="http://schemas.openxmlformats.org/drawingml/2006/main">
-            <a:r>
-              <a:t>来源与边界：</a:t>
-            </a:r>
-          </a:p>
-          <a:p xmlns:a="http://schemas.openxmlformats.org/drawingml/2006/main">
-            <a:r>
-              <a:t>syllabus.md；assignments.md Checkpoint 4。</a:t>
-            </a:r>
-          </a:p>
-          <a:p xmlns:a="http://schemas.openxmlformats.org/drawingml/2006/main">
-            <a:r>
-              <a:t/>
-            </a:r>
-          </a:p>
-          <a:p xmlns:a="http://schemas.openxmlformats.org/drawingml/2006/main">
-            <a:r>
               <a:t>[Sources]</a:t>
             </a:r>
           </a:p>
           <a:p xmlns:a="http://schemas.openxmlformats.org/drawingml/2006/main">
             <a:r>
-              <a:t/>
-            </a:r>
-          </a:p>
-          <a:p xmlns:a="http://schemas.openxmlformats.org/drawingml/2006/main">
-            <a:r>
-              <a:t>- 本课 handout.md 与 slides.md</a:t>
-            </a:r>
-          </a:p>
-          <a:p xmlns:a="http://schemas.openxmlformats.org/drawingml/2006/main">
-            <a:r>
-              <a:t/>
-            </a:r>
-          </a:p>
-          <a:p xmlns:a="http://schemas.openxmlformats.org/drawingml/2006/main">
-            <a:r>
-              <a:t>- ../../course/reading-card-case.md</a:t>
-            </a:r>
-          </a:p>
-          <a:p xmlns:a="http://schemas.openxmlformats.org/drawingml/2006/main">
-            <a:r>
-              <a:t/>
+              <a:t>本课 handout.md、judgment-task.md；../../course/judgment-path.md。</a:t>
             </a:r>
           </a:p>
           <a:p xmlns:a="http://schemas.openxmlformats.org/drawingml/2006/main">
@@ -589,7 +539,7 @@
           </a:p>
           <a:p xmlns:a="http://schemas.openxmlformats.org/drawingml/2006/main">
             <a:r>
-              <a:t>讲义位置：本课讲义；见逐页母稿映射表</a:t>
+              <a:t>讲述与校准：</a:t>
             </a:r>
           </a:p>
           <a:p xmlns:a="http://schemas.openxmlformats.org/drawingml/2006/main">
@@ -599,22 +549,17 @@
           </a:p>
           <a:p xmlns:a="http://schemas.openxmlformats.org/drawingml/2006/main">
             <a:r>
-              <a:t>屏显核对：</a:t>
-            </a:r>
-          </a:p>
-          <a:p xmlns:a="http://schemas.openxmlformats.org/drawingml/2006/main">
-            <a:r>
-              <a:t>问题定义 → 第一性原理分析 → 机制假设 → 外部输入摄取 → 证据整理 → 研究判断 → 原型验证 → 回写与表达</a:t>
-            </a:r>
-          </a:p>
-          <a:p xmlns:a="http://schemas.openxmlformats.org/drawingml/2006/main">
-            <a:r>
               <a:t/>
             </a:r>
           </a:p>
           <a:p xmlns:a="http://schemas.openxmlformats.org/drawingml/2006/main">
             <a:r>
-              <a:t>请选择一个转折：</a:t>
+              <a:t>学生动作：</a:t>
+            </a:r>
+          </a:p>
+          <a:p xmlns:a="http://schemas.openxmlformats.org/drawingml/2006/main">
+            <a:r>
+              <a:t>依据本页方法检查本人项目；按需参考。</a:t>
             </a:r>
           </a:p>
           <a:p xmlns:a="http://schemas.openxmlformats.org/drawingml/2006/main">
@@ -624,17 +569,7 @@
           </a:p>
           <a:p xmlns:a="http://schemas.openxmlformats.org/drawingml/2006/main">
             <a:r>
-              <a:t>- 哪项证据改变了问题或假设？</a:t>
-            </a:r>
-          </a:p>
-          <a:p xmlns:a="http://schemas.openxmlformats.org/drawingml/2006/main">
-            <a:r>
-              <a:t>- 哪次失败改变了工作流或边界？</a:t>
-            </a:r>
-          </a:p>
-          <a:p xmlns:a="http://schemas.openxmlformats.org/drawingml/2006/main">
-            <a:r>
-              <a:t>- 哪个判断始终不能自动化？</a:t>
+              <a:t>课堂安排：按 teaching-plan.md 专用课堂时段安排；换场计入对应时段。</a:t>
             </a:r>
           </a:p>
           <a:p xmlns:a="http://schemas.openxmlformats.org/drawingml/2006/main">
@@ -644,77 +579,12 @@
           </a:p>
           <a:p xmlns:a="http://schemas.openxmlformats.org/drawingml/2006/main">
             <a:r>
-              <a:t>教师讲述：</a:t>
-            </a:r>
-          </a:p>
-          <a:p xmlns:a="http://schemas.openxmlformats.org/drawingml/2006/main">
-            <a:r>
-              <a:t>复盘不是逐课回忆，而是解释研究判断如何变化。</a:t>
-            </a:r>
-          </a:p>
-          <a:p xmlns:a="http://schemas.openxmlformats.org/drawingml/2006/main">
-            <a:r>
-              <a:t/>
-            </a:r>
-          </a:p>
-          <a:p xmlns:a="http://schemas.openxmlformats.org/drawingml/2006/main">
-            <a:r>
-              <a:t>学生动作：</a:t>
-            </a:r>
-          </a:p>
-          <a:p xmlns:a="http://schemas.openxmlformats.org/drawingml/2006/main">
-            <a:r>
-              <a:t/>
-            </a:r>
-          </a:p>
-          <a:p xmlns:a="http://schemas.openxmlformats.org/drawingml/2006/main">
-            <a:r>
-              <a:t/>
-            </a:r>
-          </a:p>
-          <a:p xmlns:a="http://schemas.openxmlformats.org/drawingml/2006/main">
-            <a:r>
-              <a:t>来源与边界：</a:t>
-            </a:r>
-          </a:p>
-          <a:p xmlns:a="http://schemas.openxmlformats.org/drawingml/2006/main">
-            <a:r>
-              <a:t>curriculum.md；讲义 §五。</a:t>
-            </a:r>
-          </a:p>
-          <a:p xmlns:a="http://schemas.openxmlformats.org/drawingml/2006/main">
-            <a:r>
-              <a:t/>
-            </a:r>
-          </a:p>
-          <a:p xmlns:a="http://schemas.openxmlformats.org/drawingml/2006/main">
-            <a:r>
               <a:t>[Sources]</a:t>
             </a:r>
           </a:p>
           <a:p xmlns:a="http://schemas.openxmlformats.org/drawingml/2006/main">
             <a:r>
-              <a:t/>
-            </a:r>
-          </a:p>
-          <a:p xmlns:a="http://schemas.openxmlformats.org/drawingml/2006/main">
-            <a:r>
-              <a:t>- 本课 handout.md 与 slides.md</a:t>
-            </a:r>
-          </a:p>
-          <a:p xmlns:a="http://schemas.openxmlformats.org/drawingml/2006/main">
-            <a:r>
-              <a:t/>
-            </a:r>
-          </a:p>
-          <a:p xmlns:a="http://schemas.openxmlformats.org/drawingml/2006/main">
-            <a:r>
-              <a:t>- ../../course/reading-card-case.md</a:t>
-            </a:r>
-          </a:p>
-          <a:p xmlns:a="http://schemas.openxmlformats.org/drawingml/2006/main">
-            <a:r>
-              <a:t/>
+              <a:t>本课 handout.md、judgment-task.md；../../course/judgment-path.md。</a:t>
             </a:r>
           </a:p>
           <a:p xmlns:a="http://schemas.openxmlformats.org/drawingml/2006/main">
@@ -799,7 +669,7 @@
           </a:p>
           <a:p xmlns:a="http://schemas.openxmlformats.org/drawingml/2006/main">
             <a:r>
-              <a:t>讲义位置：本课讲义；见逐页母稿映射表</a:t>
+              <a:t>讲述与校准：</a:t>
             </a:r>
           </a:p>
           <a:p xmlns:a="http://schemas.openxmlformats.org/drawingml/2006/main">
@@ -809,22 +679,17 @@
           </a:p>
           <a:p xmlns:a="http://schemas.openxmlformats.org/drawingml/2006/main">
             <a:r>
-              <a:t>屏显核对：</a:t>
-            </a:r>
-          </a:p>
-          <a:p xmlns:a="http://schemas.openxmlformats.org/drawingml/2006/main">
-            <a:r>
-              <a:t>AI 在哪里有效？</a:t>
-            </a:r>
-          </a:p>
-          <a:p xmlns:a="http://schemas.openxmlformats.org/drawingml/2006/main">
-            <a:r>
               <a:t/>
             </a:r>
           </a:p>
           <a:p xmlns:a="http://schemas.openxmlformats.org/drawingml/2006/main">
             <a:r>
-              <a:t>哪里误导或失败？</a:t>
+              <a:t>学生动作：</a:t>
+            </a:r>
+          </a:p>
+          <a:p xmlns:a="http://schemas.openxmlformats.org/drawingml/2006/main">
+            <a:r>
+              <a:t>依据本页方法检查本人项目；按需参考。</a:t>
             </a:r>
           </a:p>
           <a:p xmlns:a="http://schemas.openxmlformats.org/drawingml/2006/main">
@@ -834,7 +699,7 @@
           </a:p>
           <a:p xmlns:a="http://schemas.openxmlformats.org/drawingml/2006/main">
             <a:r>
-              <a:t>人如何核验？</a:t>
+              <a:t>课堂安排：按 teaching-plan.md 专用课堂时段安排；换场计入对应时段。</a:t>
             </a:r>
           </a:p>
           <a:p xmlns:a="http://schemas.openxmlformats.org/drawingml/2006/main">
@@ -844,87 +709,12 @@
           </a:p>
           <a:p xmlns:a="http://schemas.openxmlformats.org/drawingml/2006/main">
             <a:r>
-              <a:t>哪些判断与责任不能自动化？</a:t>
-            </a:r>
-          </a:p>
-          <a:p xmlns:a="http://schemas.openxmlformats.org/drawingml/2006/main">
-            <a:r>
-              <a:t/>
-            </a:r>
-          </a:p>
-          <a:p xmlns:a="http://schemas.openxmlformats.org/drawingml/2006/main">
-            <a:r>
-              <a:t>教师讲述：</a:t>
-            </a:r>
-          </a:p>
-          <a:p xmlns:a="http://schemas.openxmlformats.org/drawingml/2006/main">
-            <a:r>
-              <a:t>让学生写一条最重要边界，回扣第 1 课。</a:t>
-            </a:r>
-          </a:p>
-          <a:p xmlns:a="http://schemas.openxmlformats.org/drawingml/2006/main">
-            <a:r>
-              <a:t/>
-            </a:r>
-          </a:p>
-          <a:p xmlns:a="http://schemas.openxmlformats.org/drawingml/2006/main">
-            <a:r>
-              <a:t>学生动作：</a:t>
-            </a:r>
-          </a:p>
-          <a:p xmlns:a="http://schemas.openxmlformats.org/drawingml/2006/main">
-            <a:r>
-              <a:t/>
-            </a:r>
-          </a:p>
-          <a:p xmlns:a="http://schemas.openxmlformats.org/drawingml/2006/main">
-            <a:r>
-              <a:t/>
-            </a:r>
-          </a:p>
-          <a:p xmlns:a="http://schemas.openxmlformats.org/drawingml/2006/main">
-            <a:r>
-              <a:t>来源与边界：</a:t>
-            </a:r>
-          </a:p>
-          <a:p xmlns:a="http://schemas.openxmlformats.org/drawingml/2006/main">
-            <a:r>
-              <a:t>讲义 §六；AGENTS.md；assessment.md。</a:t>
-            </a:r>
-          </a:p>
-          <a:p xmlns:a="http://schemas.openxmlformats.org/drawingml/2006/main">
-            <a:r>
-              <a:t/>
-            </a:r>
-          </a:p>
-          <a:p xmlns:a="http://schemas.openxmlformats.org/drawingml/2006/main">
-            <a:r>
               <a:t>[Sources]</a:t>
             </a:r>
           </a:p>
           <a:p xmlns:a="http://schemas.openxmlformats.org/drawingml/2006/main">
             <a:r>
-              <a:t/>
-            </a:r>
-          </a:p>
-          <a:p xmlns:a="http://schemas.openxmlformats.org/drawingml/2006/main">
-            <a:r>
-              <a:t>- 本课 handout.md 与 slides.md</a:t>
-            </a:r>
-          </a:p>
-          <a:p xmlns:a="http://schemas.openxmlformats.org/drawingml/2006/main">
-            <a:r>
-              <a:t/>
-            </a:r>
-          </a:p>
-          <a:p xmlns:a="http://schemas.openxmlformats.org/drawingml/2006/main">
-            <a:r>
-              <a:t>- ../../course/reading-card-case.md</a:t>
-            </a:r>
-          </a:p>
-          <a:p xmlns:a="http://schemas.openxmlformats.org/drawingml/2006/main">
-            <a:r>
-              <a:t/>
+              <a:t>本课 handout.md、judgment-task.md；../../course/judgment-path.md。</a:t>
             </a:r>
           </a:p>
           <a:p xmlns:a="http://schemas.openxmlformats.org/drawingml/2006/main">
@@ -999,7 +789,7 @@
           <a:lstStyle xmlns:a="http://schemas.openxmlformats.org/drawingml/2006/main"/>
           <a:p xmlns:a="http://schemas.openxmlformats.org/drawingml/2006/main">
             <a:r>
-              <a:t>页面：P12 提交、修复与课程收束</a:t>
+              <a:t>页面：P12 最终提交与未决问题</a:t>
             </a:r>
           </a:p>
           <a:p xmlns:a="http://schemas.openxmlformats.org/drawingml/2006/main">
@@ -1009,7 +799,12 @@
           </a:p>
           <a:p xmlns:a="http://schemas.openxmlformats.org/drawingml/2006/main">
             <a:r>
-              <a:t>讲义位置：本课讲义；见逐页母稿映射表</a:t>
+              <a:t>讲述与校准：</a:t>
+            </a:r>
+          </a:p>
+          <a:p xmlns:a="http://schemas.openxmlformats.org/drawingml/2006/main">
+            <a:r>
+              <a:t>15 分钟整理；45 分钟修订和最终提交；已有材料直接打包。 每课课外最多60分钟；详见讲义。</a:t>
             </a:r>
           </a:p>
           <a:p xmlns:a="http://schemas.openxmlformats.org/drawingml/2006/main">
@@ -1019,12 +814,12 @@
           </a:p>
           <a:p xmlns:a="http://schemas.openxmlformats.org/drawingml/2006/main">
             <a:r>
-              <a:t>屏显核对：</a:t>
-            </a:r>
-          </a:p>
-          <a:p xmlns:a="http://schemas.openxmlformats.org/drawingml/2006/main">
-            <a:r>
-              <a:t>提交当前个人项目版本：链接、tag 或压缩包</a:t>
+              <a:t>学生动作：</a:t>
+            </a:r>
+          </a:p>
+          <a:p xmlns:a="http://schemas.openxmlformats.org/drawingml/2006/main">
+            <a:r>
+              <a:t>定位实际工件与下一项动作；按既定预算收口。</a:t>
             </a:r>
           </a:p>
           <a:p xmlns:a="http://schemas.openxmlformats.org/drawingml/2006/main">
@@ -1034,7 +829,7 @@
           </a:p>
           <a:p xmlns:a="http://schemas.openxmlformats.org/drawingml/2006/main">
             <a:r>
-              <a:t>局部缺口：按教师指定期限修复并复查</a:t>
+              <a:t>课堂安排：按 teaching-plan.md 专用课堂时段安排；换场计入对应时段。</a:t>
             </a:r>
           </a:p>
           <a:p xmlns:a="http://schemas.openxmlformats.org/drawingml/2006/main">
@@ -1044,97 +839,12 @@
           </a:p>
           <a:p xmlns:a="http://schemas.openxmlformats.org/drawingml/2006/main">
             <a:r>
-              <a:t>红线情形：不适用普通修订机制</a:t>
-            </a:r>
-          </a:p>
-          <a:p xmlns:a="http://schemas.openxmlformats.org/drawingml/2006/main">
-            <a:r>
-              <a:t/>
-            </a:r>
-          </a:p>
-          <a:p xmlns:a="http://schemas.openxmlformats.org/drawingml/2006/main">
-            <a:r>
-              <a:t>&gt; 问题仍由研究者定义，证据仍可核验，实验仍可复现，结论仍有边界，责任仍由人承担。</a:t>
-            </a:r>
-          </a:p>
-          <a:p xmlns:a="http://schemas.openxmlformats.org/drawingml/2006/main">
-            <a:r>
-              <a:t/>
-            </a:r>
-          </a:p>
-          <a:p xmlns:a="http://schemas.openxmlformats.org/drawingml/2006/main">
-            <a:r>
-              <a:t>教师讲述：</a:t>
-            </a:r>
-          </a:p>
-          <a:p xmlns:a="http://schemas.openxmlformats.org/drawingml/2006/main">
-            <a:r>
-              <a:t>退出动作：每位学生写下一个当前仍“不能判断”的问题。</a:t>
-            </a:r>
-          </a:p>
-          <a:p xmlns:a="http://schemas.openxmlformats.org/drawingml/2006/main">
-            <a:r>
-              <a:t/>
-            </a:r>
-          </a:p>
-          <a:p xmlns:a="http://schemas.openxmlformats.org/drawingml/2006/main">
-            <a:r>
-              <a:t>学生动作：</a:t>
-            </a:r>
-          </a:p>
-          <a:p xmlns:a="http://schemas.openxmlformats.org/drawingml/2006/main">
-            <a:r>
-              <a:t/>
-            </a:r>
-          </a:p>
-          <a:p xmlns:a="http://schemas.openxmlformats.org/drawingml/2006/main">
-            <a:r>
-              <a:t/>
-            </a:r>
-          </a:p>
-          <a:p xmlns:a="http://schemas.openxmlformats.org/drawingml/2006/main">
-            <a:r>
-              <a:t>来源与边界：</a:t>
-            </a:r>
-          </a:p>
-          <a:p xmlns:a="http://schemas.openxmlformats.org/drawingml/2006/main">
-            <a:r>
-              <a:t>assignments.md；assessment.md；讲义 §八。</a:t>
-            </a:r>
-          </a:p>
-          <a:p xmlns:a="http://schemas.openxmlformats.org/drawingml/2006/main">
-            <a:r>
-              <a:t/>
-            </a:r>
-          </a:p>
-          <a:p xmlns:a="http://schemas.openxmlformats.org/drawingml/2006/main">
-            <a:r>
               <a:t>[Sources]</a:t>
             </a:r>
           </a:p>
           <a:p xmlns:a="http://schemas.openxmlformats.org/drawingml/2006/main">
             <a:r>
-              <a:t/>
-            </a:r>
-          </a:p>
-          <a:p xmlns:a="http://schemas.openxmlformats.org/drawingml/2006/main">
-            <a:r>
-              <a:t>- 本课 handout.md 与 slides.md</a:t>
-            </a:r>
-          </a:p>
-          <a:p xmlns:a="http://schemas.openxmlformats.org/drawingml/2006/main">
-            <a:r>
-              <a:t/>
-            </a:r>
-          </a:p>
-          <a:p xmlns:a="http://schemas.openxmlformats.org/drawingml/2006/main">
-            <a:r>
-              <a:t>- ../../course/reading-card-case.md</a:t>
-            </a:r>
-          </a:p>
-          <a:p xmlns:a="http://schemas.openxmlformats.org/drawingml/2006/main">
-            <a:r>
-              <a:t/>
+              <a:t>本课 handout.md、judgment-task.md；../../course/judgment-path.md。教学构造仅用于方法判断；本人结果以实际记录为准。</a:t>
             </a:r>
           </a:p>
           <a:p xmlns:a="http://schemas.openxmlformats.org/drawingml/2006/main">
@@ -1219,7 +929,7 @@
           </a:p>
           <a:p xmlns:a="http://schemas.openxmlformats.org/drawingml/2006/main">
             <a:r>
-              <a:t>讲义位置：本课讲义；见逐页母稿映射表</a:t>
+              <a:t>讲述与校准：</a:t>
             </a:r>
           </a:p>
           <a:p xmlns:a="http://schemas.openxmlformats.org/drawingml/2006/main">
@@ -1229,22 +939,17 @@
           </a:p>
           <a:p xmlns:a="http://schemas.openxmlformats.org/drawingml/2006/main">
             <a:r>
-              <a:t>屏显核对：</a:t>
-            </a:r>
-          </a:p>
-          <a:p xmlns:a="http://schemas.openxmlformats.org/drawingml/2006/main">
-            <a:r>
-              <a:t>**全员闪电报告**：研究问题、关键结果状态、结论边界</a:t>
-            </a:r>
-          </a:p>
-          <a:p xmlns:a="http://schemas.openxmlformats.org/drawingml/2006/main">
-            <a:r>
               <a:t/>
             </a:r>
           </a:p>
           <a:p xmlns:a="http://schemas.openxmlformats.org/drawingml/2006/main">
             <a:r>
-              <a:t>**分组证据/工作流演示**：证据定位、trace、失败、人工判断与 AI 核验</a:t>
+              <a:t>学生动作：</a:t>
+            </a:r>
+          </a:p>
+          <a:p xmlns:a="http://schemas.openxmlformats.org/drawingml/2006/main">
+            <a:r>
+              <a:t>依据本页方法检查本人项目；按需参考。</a:t>
             </a:r>
           </a:p>
           <a:p xmlns:a="http://schemas.openxmlformats.org/drawingml/2006/main">
@@ -1254,7 +959,7 @@
           </a:p>
           <a:p xmlns:a="http://schemas.openxmlformats.org/drawingml/2006/main">
             <a:r>
-              <a:t>教师在分组阶段抽查实验 ID、引用或工作流 trace。</a:t>
+              <a:t>课堂安排：按 teaching-plan.md 专用课堂时段安排；换场计入对应时段。</a:t>
             </a:r>
           </a:p>
           <a:p xmlns:a="http://schemas.openxmlformats.org/drawingml/2006/main">
@@ -1264,132 +969,12 @@
           </a:p>
           <a:p xmlns:a="http://schemas.openxmlformats.org/drawingml/2006/main">
             <a:r>
-              <a:t>教师讲述：</a:t>
-            </a:r>
-          </a:p>
-          <a:p xmlns:a="http://schemas.openxmlformats.org/drawingml/2006/main">
-            <a:r>
-              <a:t>五个必答问题由两层共同覆盖，不要求在闪电报告中全部说完。</a:t>
-            </a:r>
-          </a:p>
-          <a:p xmlns:a="http://schemas.openxmlformats.org/drawingml/2006/main">
-            <a:r>
-              <a:t/>
-            </a:r>
-          </a:p>
-          <a:p xmlns:a="http://schemas.openxmlformats.org/drawingml/2006/main">
-            <a:r>
-              <a:t>学生动作：</a:t>
-            </a:r>
-          </a:p>
-          <a:p xmlns:a="http://schemas.openxmlformats.org/drawingml/2006/main">
-            <a:r>
-              <a:t/>
-            </a:r>
-          </a:p>
-          <a:p xmlns:a="http://schemas.openxmlformats.org/drawingml/2006/main">
-            <a:r>
-              <a:t/>
-            </a:r>
-          </a:p>
-          <a:p xmlns:a="http://schemas.openxmlformats.org/drawingml/2006/main">
-            <a:r>
-              <a:t>本课板书、诊断与串词：</a:t>
-            </a:r>
-          </a:p>
-          <a:p xmlns:a="http://schemas.openxmlformats.org/drawingml/2006/main">
-            <a:r>
-              <a:t>本节替换同类口头提示，不增加既有时段。开场诊断嵌入现有开场/回顾，后续再沿原实践时段操作。</a:t>
-            </a:r>
-          </a:p>
-          <a:p xmlns:a="http://schemas.openxmlformats.org/drawingml/2006/main">
-            <a:r>
-              <a:t/>
-            </a:r>
-          </a:p>
-          <a:p xmlns:a="http://schemas.openxmlformats.org/drawingml/2006/main">
-            <a:r>
-              <a:t>- **板书主线**：问题 → 证据 → 判断 → 工作流作用 → 边界。</a:t>
-            </a:r>
-          </a:p>
-          <a:p xmlns:a="http://schemas.openxmlformats.org/drawingml/2006/main">
-            <a:r>
-              <a:t>- **诊断问题**：总展示能否只放成功结果？</a:t>
-            </a:r>
-          </a:p>
-          <a:p xmlns:a="http://schemas.openxmlformats.org/drawingml/2006/main">
-            <a:r>
-              <a:t>- **预期回答**：应能反查关键依据、失败/局限、人工判断和AI核验。</a:t>
-            </a:r>
-          </a:p>
-          <a:p xmlns:a="http://schemas.openxmlformats.org/drawingml/2006/main">
-            <a:r>
-              <a:t>- **常见误答后的追问**：普通技术故障进入修复，不能和伪造记录混为一谈。</a:t>
-            </a:r>
-          </a:p>
-          <a:p xmlns:a="http://schemas.openxmlformats.org/drawingml/2006/main">
-            <a:r>
-              <a:t>- **过渡串词**：“用抽查发现的具体缺口完成最终修订与归档。”</a:t>
-            </a:r>
-          </a:p>
-          <a:p xmlns:a="http://schemas.openxmlformats.org/drawingml/2006/main">
-            <a:r>
-              <a:t>- **当堂最小产出**：本人论证门完整材料及真实抽查记录。</a:t>
-            </a:r>
-          </a:p>
-          <a:p xmlns:a="http://schemas.openxmlformats.org/drawingml/2006/main">
-            <a:r>
-              <a:t>- **退出记录**：写“已完成的动作、本人项目仍缺的证据/工件、下次补齐位置”。使用教师包时标明课堂方法练习，不能据此宣称本人研究门通过；正式提交课次仍为第 6、9、13、16 课。</a:t>
-            </a:r>
-          </a:p>
-          <a:p xmlns:a="http://schemas.openxmlformats.org/drawingml/2006/main">
-            <a:r>
-              <a:t/>
-            </a:r>
-          </a:p>
-          <a:p xmlns:a="http://schemas.openxmlformats.org/drawingml/2006/main">
-            <a:r>
-              <a:t>来源与边界：</a:t>
-            </a:r>
-          </a:p>
-          <a:p xmlns:a="http://schemas.openxmlformats.org/drawingml/2006/main">
-            <a:r>
-              <a:t>讲义 §四；备课规划第 16 课。</a:t>
-            </a:r>
-          </a:p>
-          <a:p xmlns:a="http://schemas.openxmlformats.org/drawingml/2006/main">
-            <a:r>
-              <a:t/>
-            </a:r>
-          </a:p>
-          <a:p xmlns:a="http://schemas.openxmlformats.org/drawingml/2006/main">
-            <a:r>
               <a:t>[Sources]</a:t>
             </a:r>
           </a:p>
           <a:p xmlns:a="http://schemas.openxmlformats.org/drawingml/2006/main">
             <a:r>
-              <a:t/>
-            </a:r>
-          </a:p>
-          <a:p xmlns:a="http://schemas.openxmlformats.org/drawingml/2006/main">
-            <a:r>
-              <a:t>- 本课 handout.md 与 slides.md</a:t>
-            </a:r>
-          </a:p>
-          <a:p xmlns:a="http://schemas.openxmlformats.org/drawingml/2006/main">
-            <a:r>
-              <a:t/>
-            </a:r>
-          </a:p>
-          <a:p xmlns:a="http://schemas.openxmlformats.org/drawingml/2006/main">
-            <a:r>
-              <a:t>- ../../course/reading-card-case.md</a:t>
-            </a:r>
-          </a:p>
-          <a:p xmlns:a="http://schemas.openxmlformats.org/drawingml/2006/main">
-            <a:r>
-              <a:t/>
+              <a:t>本课 handout.md、judgment-task.md；../../course/judgment-path.md。</a:t>
             </a:r>
           </a:p>
           <a:p xmlns:a="http://schemas.openxmlformats.org/drawingml/2006/main">
@@ -1474,7 +1059,7 @@
           </a:p>
           <a:p xmlns:a="http://schemas.openxmlformats.org/drawingml/2006/main">
             <a:r>
-              <a:t>讲义位置：本课讲义；见逐页母稿映射表</a:t>
+              <a:t>讲述与校准：</a:t>
             </a:r>
           </a:p>
           <a:p xmlns:a="http://schemas.openxmlformats.org/drawingml/2006/main">
@@ -1484,32 +1069,17 @@
           </a:p>
           <a:p xmlns:a="http://schemas.openxmlformats.org/drawingml/2006/main">
             <a:r>
-              <a:t>屏显核对：</a:t>
-            </a:r>
-          </a:p>
-          <a:p xmlns:a="http://schemas.openxmlformats.org/drawingml/2006/main">
-            <a:r>
-              <a:t>闪电报告：</a:t>
-            </a:r>
-          </a:p>
-          <a:p xmlns:a="http://schemas.openxmlformats.org/drawingml/2006/main">
-            <a:r>
               <a:t/>
             </a:r>
           </a:p>
           <a:p xmlns:a="http://schemas.openxmlformats.org/drawingml/2006/main">
             <a:r>
-              <a:t>1. 我的研究问题与关键判断</a:t>
-            </a:r>
-          </a:p>
-          <a:p xmlns:a="http://schemas.openxmlformats.org/drawingml/2006/main">
-            <a:r>
-              <a:t>2. 最关键结果：支持／反驳／仍不能判断</a:t>
-            </a:r>
-          </a:p>
-          <a:p xmlns:a="http://schemas.openxmlformats.org/drawingml/2006/main">
-            <a:r>
-              <a:t>3. 当前结论边界与下一步</a:t>
+              <a:t>学生动作：</a:t>
+            </a:r>
+          </a:p>
+          <a:p xmlns:a="http://schemas.openxmlformats.org/drawingml/2006/main">
+            <a:r>
+              <a:t>依据本页方法检查本人项目；按需参考。</a:t>
             </a:r>
           </a:p>
           <a:p xmlns:a="http://schemas.openxmlformats.org/drawingml/2006/main">
@@ -1519,7 +1089,7 @@
           </a:p>
           <a:p xmlns:a="http://schemas.openxmlformats.org/drawingml/2006/main">
             <a:r>
-              <a:t>只用一页；关键数字给证据或运行记录位置。</a:t>
+              <a:t>课堂安排：按 teaching-plan.md 专用课堂时段安排；换场计入对应时段。</a:t>
             </a:r>
           </a:p>
           <a:p xmlns:a="http://schemas.openxmlformats.org/drawingml/2006/main">
@@ -1529,77 +1099,12 @@
           </a:p>
           <a:p xmlns:a="http://schemas.openxmlformats.org/drawingml/2006/main">
             <a:r>
-              <a:t>教师讲述：</a:t>
-            </a:r>
-          </a:p>
-          <a:p xmlns:a="http://schemas.openxmlformats.org/drawingml/2006/main">
-            <a:r>
-              <a:t>每人占用 2 分钟时段，包含交接；按预排名单连续换人，不逐人长评。</a:t>
-            </a:r>
-          </a:p>
-          <a:p xmlns:a="http://schemas.openxmlformats.org/drawingml/2006/main">
-            <a:r>
-              <a:t/>
-            </a:r>
-          </a:p>
-          <a:p xmlns:a="http://schemas.openxmlformats.org/drawingml/2006/main">
-            <a:r>
-              <a:t>学生动作：</a:t>
-            </a:r>
-          </a:p>
-          <a:p xmlns:a="http://schemas.openxmlformats.org/drawingml/2006/main">
-            <a:r>
-              <a:t/>
-            </a:r>
-          </a:p>
-          <a:p xmlns:a="http://schemas.openxmlformats.org/drawingml/2006/main">
-            <a:r>
-              <a:t/>
-            </a:r>
-          </a:p>
-          <a:p xmlns:a="http://schemas.openxmlformats.org/drawingml/2006/main">
-            <a:r>
-              <a:t>来源与边界：</a:t>
-            </a:r>
-          </a:p>
-          <a:p xmlns:a="http://schemas.openxmlformats.org/drawingml/2006/main">
-            <a:r>
-              <a:t>讲义 §四；Alley, *The Craft of Scientific Presentations*。</a:t>
-            </a:r>
-          </a:p>
-          <a:p xmlns:a="http://schemas.openxmlformats.org/drawingml/2006/main">
-            <a:r>
-              <a:t/>
-            </a:r>
-          </a:p>
-          <a:p xmlns:a="http://schemas.openxmlformats.org/drawingml/2006/main">
-            <a:r>
               <a:t>[Sources]</a:t>
             </a:r>
           </a:p>
           <a:p xmlns:a="http://schemas.openxmlformats.org/drawingml/2006/main">
             <a:r>
-              <a:t/>
-            </a:r>
-          </a:p>
-          <a:p xmlns:a="http://schemas.openxmlformats.org/drawingml/2006/main">
-            <a:r>
-              <a:t>- 本课 handout.md 与 slides.md</a:t>
-            </a:r>
-          </a:p>
-          <a:p xmlns:a="http://schemas.openxmlformats.org/drawingml/2006/main">
-            <a:r>
-              <a:t/>
-            </a:r>
-          </a:p>
-          <a:p xmlns:a="http://schemas.openxmlformats.org/drawingml/2006/main">
-            <a:r>
-              <a:t>- ../../course/reading-card-case.md</a:t>
-            </a:r>
-          </a:p>
-          <a:p xmlns:a="http://schemas.openxmlformats.org/drawingml/2006/main">
-            <a:r>
-              <a:t/>
+              <a:t>本课 handout.md、judgment-task.md；../../course/judgment-path.md。</a:t>
             </a:r>
           </a:p>
           <a:p xmlns:a="http://schemas.openxmlformats.org/drawingml/2006/main">
@@ -1684,7 +1189,7 @@
           </a:p>
           <a:p xmlns:a="http://schemas.openxmlformats.org/drawingml/2006/main">
             <a:r>
-              <a:t>讲义位置：本课讲义；见逐页母稿映射表</a:t>
+              <a:t>讲述与校准：</a:t>
             </a:r>
           </a:p>
           <a:p xmlns:a="http://schemas.openxmlformats.org/drawingml/2006/main">
@@ -1694,22 +1199,17 @@
           </a:p>
           <a:p xmlns:a="http://schemas.openxmlformats.org/drawingml/2006/main">
             <a:r>
-              <a:t>屏显核对：</a:t>
-            </a:r>
-          </a:p>
-          <a:p xmlns:a="http://schemas.openxmlformats.org/drawingml/2006/main">
-            <a:r>
-              <a:t>按课堂名单依次报告。</a:t>
-            </a:r>
-          </a:p>
-          <a:p xmlns:a="http://schemas.openxmlformats.org/drawingml/2006/main">
-            <a:r>
               <a:t/>
             </a:r>
           </a:p>
           <a:p xmlns:a="http://schemas.openxmlformats.org/drawingml/2006/main">
             <a:r>
-              <a:t>研究问题 → 关键结果状态 → 结论边界</a:t>
+              <a:t>学生动作：</a:t>
+            </a:r>
+          </a:p>
+          <a:p xmlns:a="http://schemas.openxmlformats.org/drawingml/2006/main">
+            <a:r>
+              <a:t>依据本页方法检查本人项目；按需参考。</a:t>
             </a:r>
           </a:p>
           <a:p xmlns:a="http://schemas.openxmlformats.org/drawingml/2006/main">
@@ -1719,7 +1219,7 @@
           </a:p>
           <a:p xmlns:a="http://schemas.openxmlformats.org/drawingml/2006/main">
             <a:r>
-              <a:t>下一位提前打开自己的一页报告。</a:t>
+              <a:t>课堂安排：按 teaching-plan.md 专用课堂时段安排；换场计入对应时段。</a:t>
             </a:r>
           </a:p>
           <a:p xmlns:a="http://schemas.openxmlformats.org/drawingml/2006/main">
@@ -1729,77 +1229,12 @@
           </a:p>
           <a:p xmlns:a="http://schemas.openxmlformats.org/drawingml/2006/main">
             <a:r>
-              <a:t>教师讲述：</a:t>
-            </a:r>
-          </a:p>
-          <a:p xmlns:a="http://schemas.openxmlformats.org/drawingml/2006/main">
-            <a:r>
-              <a:t>停留页。25 人连续完成；教师只记录状态和边界是否可辨。</a:t>
-            </a:r>
-          </a:p>
-          <a:p xmlns:a="http://schemas.openxmlformats.org/drawingml/2006/main">
-            <a:r>
-              <a:t/>
-            </a:r>
-          </a:p>
-          <a:p xmlns:a="http://schemas.openxmlformats.org/drawingml/2006/main">
-            <a:r>
-              <a:t>学生动作：</a:t>
-            </a:r>
-          </a:p>
-          <a:p xmlns:a="http://schemas.openxmlformats.org/drawingml/2006/main">
-            <a:r>
-              <a:t/>
-            </a:r>
-          </a:p>
-          <a:p xmlns:a="http://schemas.openxmlformats.org/drawingml/2006/main">
-            <a:r>
-              <a:t/>
-            </a:r>
-          </a:p>
-          <a:p xmlns:a="http://schemas.openxmlformats.org/drawingml/2006/main">
-            <a:r>
-              <a:t>来源与边界：</a:t>
-            </a:r>
-          </a:p>
-          <a:p xmlns:a="http://schemas.openxmlformats.org/drawingml/2006/main">
-            <a:r>
-              <a:t>班级展示名单；不在课件保存学生敏感信息，现场临时填入。</a:t>
-            </a:r>
-          </a:p>
-          <a:p xmlns:a="http://schemas.openxmlformats.org/drawingml/2006/main">
-            <a:r>
-              <a:t/>
-            </a:r>
-          </a:p>
-          <a:p xmlns:a="http://schemas.openxmlformats.org/drawingml/2006/main">
-            <a:r>
               <a:t>[Sources]</a:t>
             </a:r>
           </a:p>
           <a:p xmlns:a="http://schemas.openxmlformats.org/drawingml/2006/main">
             <a:r>
-              <a:t/>
-            </a:r>
-          </a:p>
-          <a:p xmlns:a="http://schemas.openxmlformats.org/drawingml/2006/main">
-            <a:r>
-              <a:t>- 本课 handout.md 与 slides.md</a:t>
-            </a:r>
-          </a:p>
-          <a:p xmlns:a="http://schemas.openxmlformats.org/drawingml/2006/main">
-            <a:r>
-              <a:t/>
-            </a:r>
-          </a:p>
-          <a:p xmlns:a="http://schemas.openxmlformats.org/drawingml/2006/main">
-            <a:r>
-              <a:t>- ../../course/reading-card-case.md</a:t>
-            </a:r>
-          </a:p>
-          <a:p xmlns:a="http://schemas.openxmlformats.org/drawingml/2006/main">
-            <a:r>
-              <a:t/>
+              <a:t>本课 handout.md、judgment-task.md；../../course/judgment-path.md。</a:t>
             </a:r>
           </a:p>
           <a:p xmlns:a="http://schemas.openxmlformats.org/drawingml/2006/main">
@@ -1884,7 +1319,7 @@
           </a:p>
           <a:p xmlns:a="http://schemas.openxmlformats.org/drawingml/2006/main">
             <a:r>
-              <a:t>讲义位置：本课讲义；见逐页母稿映射表</a:t>
+              <a:t>讲述与校准：</a:t>
             </a:r>
           </a:p>
           <a:p xmlns:a="http://schemas.openxmlformats.org/drawingml/2006/main">
@@ -1894,42 +1329,17 @@
           </a:p>
           <a:p xmlns:a="http://schemas.openxmlformats.org/drawingml/2006/main">
             <a:r>
-              <a:t>屏显核对：</a:t>
-            </a:r>
-          </a:p>
-          <a:p xmlns:a="http://schemas.openxmlformats.org/drawingml/2006/main">
-            <a:r>
-              <a:t>每人展示：</a:t>
-            </a:r>
-          </a:p>
-          <a:p xmlns:a="http://schemas.openxmlformats.org/drawingml/2006/main">
-            <a:r>
               <a:t/>
             </a:r>
           </a:p>
           <a:p xmlns:a="http://schemas.openxmlformats.org/drawingml/2006/main">
             <a:r>
-              <a:t>- 一条结论如何反查证据或实验记录</a:t>
-            </a:r>
-          </a:p>
-          <a:p xmlns:a="http://schemas.openxmlformats.org/drawingml/2006/main">
-            <a:r>
-              <a:t>- 工作流改善了哪个科研动作</a:t>
-            </a:r>
-          </a:p>
-          <a:p xmlns:a="http://schemas.openxmlformats.org/drawingml/2006/main">
-            <a:r>
-              <a:t>- 一次失败及修复／边界</a:t>
-            </a:r>
-          </a:p>
-          <a:p xmlns:a="http://schemas.openxmlformats.org/drawingml/2006/main">
-            <a:r>
-              <a:t>- 一个不可外包的人工判断</a:t>
-            </a:r>
-          </a:p>
-          <a:p xmlns:a="http://schemas.openxmlformats.org/drawingml/2006/main">
-            <a:r>
-              <a:t>- AI 如何被核验</a:t>
+              <a:t>学生动作：</a:t>
+            </a:r>
+          </a:p>
+          <a:p xmlns:a="http://schemas.openxmlformats.org/drawingml/2006/main">
+            <a:r>
+              <a:t>依据本页方法检查本人项目；按需参考。</a:t>
             </a:r>
           </a:p>
           <a:p xmlns:a="http://schemas.openxmlformats.org/drawingml/2006/main">
@@ -1939,12 +1349,7 @@
           </a:p>
           <a:p xmlns:a="http://schemas.openxmlformats.org/drawingml/2006/main">
             <a:r>
-              <a:t>教师讲述：</a:t>
-            </a:r>
-          </a:p>
-          <a:p xmlns:a="http://schemas.openxmlformats.org/drawingml/2006/main">
-            <a:r>
-              <a:t>7 组并行，每组 3—4 人；每人约 5—6 分钟。</a:t>
+              <a:t>课堂安排：按 teaching-plan.md 专用课堂时段安排；换场计入对应时段。</a:t>
             </a:r>
           </a:p>
           <a:p xmlns:a="http://schemas.openxmlformats.org/drawingml/2006/main">
@@ -1954,62 +1359,12 @@
           </a:p>
           <a:p xmlns:a="http://schemas.openxmlformats.org/drawingml/2006/main">
             <a:r>
-              <a:t>学生动作：</a:t>
-            </a:r>
-          </a:p>
-          <a:p xmlns:a="http://schemas.openxmlformats.org/drawingml/2006/main">
-            <a:r>
-              <a:t/>
-            </a:r>
-          </a:p>
-          <a:p xmlns:a="http://schemas.openxmlformats.org/drawingml/2006/main">
-            <a:r>
-              <a:t/>
-            </a:r>
-          </a:p>
-          <a:p xmlns:a="http://schemas.openxmlformats.org/drawingml/2006/main">
-            <a:r>
-              <a:t>来源与边界：</a:t>
-            </a:r>
-          </a:p>
-          <a:p xmlns:a="http://schemas.openxmlformats.org/drawingml/2006/main">
-            <a:r>
-              <a:t>讲义 §二—四；assignments.md Checkpoint 4。</a:t>
-            </a:r>
-          </a:p>
-          <a:p xmlns:a="http://schemas.openxmlformats.org/drawingml/2006/main">
-            <a:r>
-              <a:t/>
-            </a:r>
-          </a:p>
-          <a:p xmlns:a="http://schemas.openxmlformats.org/drawingml/2006/main">
-            <a:r>
               <a:t>[Sources]</a:t>
             </a:r>
           </a:p>
           <a:p xmlns:a="http://schemas.openxmlformats.org/drawingml/2006/main">
             <a:r>
-              <a:t/>
-            </a:r>
-          </a:p>
-          <a:p xmlns:a="http://schemas.openxmlformats.org/drawingml/2006/main">
-            <a:r>
-              <a:t>- 本课 handout.md 与 slides.md</a:t>
-            </a:r>
-          </a:p>
-          <a:p xmlns:a="http://schemas.openxmlformats.org/drawingml/2006/main">
-            <a:r>
-              <a:t/>
-            </a:r>
-          </a:p>
-          <a:p xmlns:a="http://schemas.openxmlformats.org/drawingml/2006/main">
-            <a:r>
-              <a:t>- ../../course/reading-card-case.md</a:t>
-            </a:r>
-          </a:p>
-          <a:p xmlns:a="http://schemas.openxmlformats.org/drawingml/2006/main">
-            <a:r>
-              <a:t/>
+              <a:t>本课 handout.md、judgment-task.md；../../course/judgment-path.md。</a:t>
             </a:r>
           </a:p>
           <a:p xmlns:a="http://schemas.openxmlformats.org/drawingml/2006/main">
@@ -2084,7 +1439,7 @@
           <a:lstStyle xmlns:a="http://schemas.openxmlformats.org/drawingml/2006/main"/>
           <a:p xmlns:a="http://schemas.openxmlformats.org/drawingml/2006/main">
             <a:r>
-              <a:t>页面：P06 证据追踪演示：从结论反查</a:t>
+              <a:t>页面：P06 结论—证据—运行—决定</a:t>
             </a:r>
           </a:p>
           <a:p xmlns:a="http://schemas.openxmlformats.org/drawingml/2006/main">
@@ -2094,7 +1449,12 @@
           </a:p>
           <a:p xmlns:a="http://schemas.openxmlformats.org/drawingml/2006/main">
             <a:r>
-              <a:t>讲义位置：本课讲义；见逐页母稿映射表</a:t>
+              <a:t>讲述与校准：</a:t>
+            </a:r>
+          </a:p>
+          <a:p xmlns:a="http://schemas.openxmlformats.org/drawingml/2006/main">
+            <a:r>
+              <a:t>先独立作答，再同伴比较；以下依据只在校准时揭示。</a:t>
             </a:r>
           </a:p>
           <a:p xmlns:a="http://schemas.openxmlformats.org/drawingml/2006/main">
@@ -2104,12 +1464,7 @@
           </a:p>
           <a:p xmlns:a="http://schemas.openxmlformats.org/drawingml/2006/main">
             <a:r>
-              <a:t>屏显核对：</a:t>
-            </a:r>
-          </a:p>
-          <a:p xmlns:a="http://schemas.openxmlformats.org/drawingml/2006/main">
-            <a:r>
-              <a:t>结论 → 证据项／实验 ID → 运行记录 → 上游判断 → 边界</a:t>
+              <a:t>根据断点是否影响核心结论决定：路径缺失但原记录存在可补索引；评价口径与结果不符须改结论并复核；无实际运行不能用讲述替代。未决问题可合格呈现，不能伪装全部通过。每人都有展示和同伴反查，教师只抽样不代表每人运行已被教师验证。</a:t>
             </a:r>
           </a:p>
           <a:p xmlns:a="http://schemas.openxmlformats.org/drawingml/2006/main">
@@ -2119,7 +1474,12 @@
           </a:p>
           <a:p xmlns:a="http://schemas.openxmlformats.org/drawingml/2006/main">
             <a:r>
-              <a:t>研究判断：支持／反驳／仍不能判断</a:t>
+              <a:t>学生动作：</a:t>
+            </a:r>
+          </a:p>
+          <a:p xmlns:a="http://schemas.openxmlformats.org/drawingml/2006/main">
+            <a:r>
+              <a:t>先独立写决定和证据，后同伴比较；校准后再回写。</a:t>
             </a:r>
           </a:p>
           <a:p xmlns:a="http://schemas.openxmlformats.org/drawingml/2006/main">
@@ -2129,7 +1489,7 @@
           </a:p>
           <a:p xmlns:a="http://schemas.openxmlformats.org/drawingml/2006/main">
             <a:r>
-              <a:t>证据成熟度：满足独立证据条件后才标 `stable`；方向支持仍需保留未决解释。</a:t>
+              <a:t>课堂安排：按 teaching-plan.md 专用课堂时段安排；换场计入对应时段。</a:t>
             </a:r>
           </a:p>
           <a:p xmlns:a="http://schemas.openxmlformats.org/drawingml/2006/main">
@@ -2139,77 +1499,12 @@
           </a:p>
           <a:p xmlns:a="http://schemas.openxmlformats.org/drawingml/2006/main">
             <a:r>
-              <a:t>教师讲述：</a:t>
-            </a:r>
-          </a:p>
-          <a:p xmlns:a="http://schemas.openxmlformats.org/drawingml/2006/main">
-            <a:r>
-              <a:t>组员随机指定一条结论，让报告者现场反查。</a:t>
-            </a:r>
-          </a:p>
-          <a:p xmlns:a="http://schemas.openxmlformats.org/drawingml/2006/main">
-            <a:r>
-              <a:t/>
-            </a:r>
-          </a:p>
-          <a:p xmlns:a="http://schemas.openxmlformats.org/drawingml/2006/main">
-            <a:r>
-              <a:t>学生动作：</a:t>
-            </a:r>
-          </a:p>
-          <a:p xmlns:a="http://schemas.openxmlformats.org/drawingml/2006/main">
-            <a:r>
-              <a:t/>
-            </a:r>
-          </a:p>
-          <a:p xmlns:a="http://schemas.openxmlformats.org/drawingml/2006/main">
-            <a:r>
-              <a:t/>
-            </a:r>
-          </a:p>
-          <a:p xmlns:a="http://schemas.openxmlformats.org/drawingml/2006/main">
-            <a:r>
-              <a:t>来源与边界：</a:t>
-            </a:r>
-          </a:p>
-          <a:p xmlns:a="http://schemas.openxmlformats.org/drawingml/2006/main">
-            <a:r>
-              <a:t>讲义 §二；AGENTS.md 证据标准。</a:t>
-            </a:r>
-          </a:p>
-          <a:p xmlns:a="http://schemas.openxmlformats.org/drawingml/2006/main">
-            <a:r>
-              <a:t/>
-            </a:r>
-          </a:p>
-          <a:p xmlns:a="http://schemas.openxmlformats.org/drawingml/2006/main">
-            <a:r>
               <a:t>[Sources]</a:t>
             </a:r>
           </a:p>
           <a:p xmlns:a="http://schemas.openxmlformats.org/drawingml/2006/main">
             <a:r>
-              <a:t/>
-            </a:r>
-          </a:p>
-          <a:p xmlns:a="http://schemas.openxmlformats.org/drawingml/2006/main">
-            <a:r>
-              <a:t>- 本课 handout.md 与 slides.md</a:t>
-            </a:r>
-          </a:p>
-          <a:p xmlns:a="http://schemas.openxmlformats.org/drawingml/2006/main">
-            <a:r>
-              <a:t/>
-            </a:r>
-          </a:p>
-          <a:p xmlns:a="http://schemas.openxmlformats.org/drawingml/2006/main">
-            <a:r>
-              <a:t>- ../../course/reading-card-case.md</a:t>
-            </a:r>
-          </a:p>
-          <a:p xmlns:a="http://schemas.openxmlformats.org/drawingml/2006/main">
-            <a:r>
-              <a:t/>
+              <a:t>本课 handout.md、judgment-task.md；../../course/judgment-path.md。教学构造仅用于方法判断；本人结果以实际记录为准。</a:t>
             </a:r>
           </a:p>
           <a:p xmlns:a="http://schemas.openxmlformats.org/drawingml/2006/main">
@@ -2284,7 +1579,7 @@
           <a:lstStyle xmlns:a="http://schemas.openxmlformats.org/drawingml/2006/main"/>
           <a:p xmlns:a="http://schemas.openxmlformats.org/drawingml/2006/main">
             <a:r>
-              <a:t>页面：P07 工作流演示：展示真实作用与失败</a:t>
+              <a:t>页面：P07 本人项目：决定、核验与回写</a:t>
             </a:r>
           </a:p>
           <a:p xmlns:a="http://schemas.openxmlformats.org/drawingml/2006/main">
@@ -2294,7 +1589,12 @@
           </a:p>
           <a:p xmlns:a="http://schemas.openxmlformats.org/drawingml/2006/main">
             <a:r>
-              <a:t>讲义位置：本课讲义；见逐页母稿映射表</a:t>
+              <a:t>讲述与校准：</a:t>
+            </a:r>
+          </a:p>
+          <a:p xmlns:a="http://schemas.openxmlformats.org/drawingml/2006/main">
+            <a:r>
+              <a:t>根据断点是否影响核心结论决定：路径缺失但原记录存在可补索引；评价口径与结果不符须改结论并复核；无实际运行不能用讲述替代。未决问题可合格呈现，不能伪装全部通过。每人都有展示和同伴反查，教师只抽样不代表每人运行已被教师验证。 按本课专用90分钟流程进行，不套用普通课时间。</a:t>
             </a:r>
           </a:p>
           <a:p xmlns:a="http://schemas.openxmlformats.org/drawingml/2006/main">
@@ -2304,12 +1604,12 @@
           </a:p>
           <a:p xmlns:a="http://schemas.openxmlformats.org/drawingml/2006/main">
             <a:r>
-              <a:t>屏显核对：</a:t>
-            </a:r>
-          </a:p>
-          <a:p xmlns:a="http://schemas.openxmlformats.org/drawingml/2006/main">
-            <a:r>
-              <a:t>输入 → 权限边界 → 执行 → 人工审核 → 输出／失败</a:t>
+              <a:t>学生动作：</a:t>
+            </a:r>
+          </a:p>
+          <a:p xmlns:a="http://schemas.openxmlformats.org/drawingml/2006/main">
+            <a:r>
+              <a:t>全员闪电展示；固定 3–4 人组轮流反查。直接打开现有材料，说明一个关键取舍、失败或未决问题，并完成最终提交与复盘。</a:t>
             </a:r>
           </a:p>
           <a:p xmlns:a="http://schemas.openxmlformats.org/drawingml/2006/main">
@@ -2319,22 +1619,7 @@
           </a:p>
           <a:p xmlns:a="http://schemas.openxmlformats.org/drawingml/2006/main">
             <a:r>
-              <a:t>改善了哪个科研动作，如何评价？</a:t>
-            </a:r>
-          </a:p>
-          <a:p xmlns:a="http://schemas.openxmlformats.org/drawingml/2006/main">
-            <a:r>
-              <a:t>哪次运行失败，原因已查明还是仍待查？</a:t>
-            </a:r>
-          </a:p>
-          <a:p xmlns:a="http://schemas.openxmlformats.org/drawingml/2006/main">
-            <a:r>
-              <a:t>修复了什么，哪些边界仍保留？</a:t>
-            </a:r>
-          </a:p>
-          <a:p xmlns:a="http://schemas.openxmlformats.org/drawingml/2006/main">
-            <a:r>
-              <a:t>哪个判断不能自动化？</a:t>
+              <a:t>课堂安排：按 teaching-plan.md 专用课堂时段安排；换场计入对应时段。</a:t>
             </a:r>
           </a:p>
           <a:p xmlns:a="http://schemas.openxmlformats.org/drawingml/2006/main">
@@ -2344,77 +1629,12 @@
           </a:p>
           <a:p xmlns:a="http://schemas.openxmlformats.org/drawingml/2006/main">
             <a:r>
-              <a:t>教师讲述：</a:t>
-            </a:r>
-          </a:p>
-          <a:p xmlns:a="http://schemas.openxmlformats.org/drawingml/2006/main">
-            <a:r>
-              <a:t>不得只演示“能跑”。评估证据来自文件变化、日志、对照与人工核验。</a:t>
-            </a:r>
-          </a:p>
-          <a:p xmlns:a="http://schemas.openxmlformats.org/drawingml/2006/main">
-            <a:r>
-              <a:t/>
-            </a:r>
-          </a:p>
-          <a:p xmlns:a="http://schemas.openxmlformats.org/drawingml/2006/main">
-            <a:r>
-              <a:t>学生动作：</a:t>
-            </a:r>
-          </a:p>
-          <a:p xmlns:a="http://schemas.openxmlformats.org/drawingml/2006/main">
-            <a:r>
-              <a:t/>
-            </a:r>
-          </a:p>
-          <a:p xmlns:a="http://schemas.openxmlformats.org/drawingml/2006/main">
-            <a:r>
-              <a:t/>
-            </a:r>
-          </a:p>
-          <a:p xmlns:a="http://schemas.openxmlformats.org/drawingml/2006/main">
-            <a:r>
-              <a:t>来源与边界：</a:t>
-            </a:r>
-          </a:p>
-          <a:p xmlns:a="http://schemas.openxmlformats.org/drawingml/2006/main">
-            <a:r>
-              <a:t>讲义 §三；第 10—13 课同一工作流工件。</a:t>
-            </a:r>
-          </a:p>
-          <a:p xmlns:a="http://schemas.openxmlformats.org/drawingml/2006/main">
-            <a:r>
-              <a:t/>
-            </a:r>
-          </a:p>
-          <a:p xmlns:a="http://schemas.openxmlformats.org/drawingml/2006/main">
-            <a:r>
               <a:t>[Sources]</a:t>
             </a:r>
           </a:p>
           <a:p xmlns:a="http://schemas.openxmlformats.org/drawingml/2006/main">
             <a:r>
-              <a:t/>
-            </a:r>
-          </a:p>
-          <a:p xmlns:a="http://schemas.openxmlformats.org/drawingml/2006/main">
-            <a:r>
-              <a:t>- 本课 handout.md 与 slides.md</a:t>
-            </a:r>
-          </a:p>
-          <a:p xmlns:a="http://schemas.openxmlformats.org/drawingml/2006/main">
-            <a:r>
-              <a:t/>
-            </a:r>
-          </a:p>
-          <a:p xmlns:a="http://schemas.openxmlformats.org/drawingml/2006/main">
-            <a:r>
-              <a:t>- ../../course/reading-card-case.md</a:t>
-            </a:r>
-          </a:p>
-          <a:p xmlns:a="http://schemas.openxmlformats.org/drawingml/2006/main">
-            <a:r>
-              <a:t/>
+              <a:t>本课 handout.md、judgment-task.md；../../course/judgment-path.md。教学构造仅用于方法判断；本人结果以实际记录为准。</a:t>
             </a:r>
           </a:p>
           <a:p xmlns:a="http://schemas.openxmlformats.org/drawingml/2006/main">
@@ -2499,7 +1719,7 @@
           </a:p>
           <a:p xmlns:a="http://schemas.openxmlformats.org/drawingml/2006/main">
             <a:r>
-              <a:t>讲义位置：本课讲义；见逐页母稿映射表</a:t>
+              <a:t>讲述与校准：</a:t>
             </a:r>
           </a:p>
           <a:p xmlns:a="http://schemas.openxmlformats.org/drawingml/2006/main">
@@ -2509,22 +1729,17 @@
           </a:p>
           <a:p xmlns:a="http://schemas.openxmlformats.org/drawingml/2006/main">
             <a:r>
-              <a:t>屏显核对：</a:t>
-            </a:r>
-          </a:p>
-          <a:p xmlns:a="http://schemas.openxmlformats.org/drawingml/2006/main">
-            <a:r>
-              <a:t>抽查对象：实验 ID｜引用｜工作流 trace</a:t>
-            </a:r>
-          </a:p>
-          <a:p xmlns:a="http://schemas.openxmlformats.org/drawingml/2006/main">
-            <a:r>
               <a:t/>
             </a:r>
           </a:p>
           <a:p xmlns:a="http://schemas.openxmlformats.org/drawingml/2006/main">
             <a:r>
-              <a:t>**普通失败**：环境、依赖、记录缺口、诚实披露的复现失败 → 修复与复盘</a:t>
+              <a:t>学生动作：</a:t>
+            </a:r>
+          </a:p>
+          <a:p xmlns:a="http://schemas.openxmlformats.org/drawingml/2006/main">
+            <a:r>
+              <a:t>依据本页方法检查本人项目；按需参考。</a:t>
             </a:r>
           </a:p>
           <a:p xmlns:a="http://schemas.openxmlformats.org/drawingml/2006/main">
@@ -2534,7 +1749,7 @@
           </a:p>
           <a:p xmlns:a="http://schemas.openxmlformats.org/drawingml/2006/main">
             <a:r>
-              <a:t>**学术规范红线**：编造、隐瞒、越权、伪造 → 按课程规则处理</a:t>
+              <a:t>课堂安排：按 teaching-plan.md 专用课堂时段安排；换场计入对应时段。</a:t>
             </a:r>
           </a:p>
           <a:p xmlns:a="http://schemas.openxmlformats.org/drawingml/2006/main">
@@ -2544,77 +1759,12 @@
           </a:p>
           <a:p xmlns:a="http://schemas.openxmlformats.org/drawingml/2006/main">
             <a:r>
-              <a:t>教师讲述：</a:t>
-            </a:r>
-          </a:p>
-          <a:p xmlns:a="http://schemas.openxmlformats.org/drawingml/2006/main">
-            <a:r>
-              <a:t>记录对象、位置、现象、判断和后续动作；不在课堂逐台排障。</a:t>
-            </a:r>
-          </a:p>
-          <a:p xmlns:a="http://schemas.openxmlformats.org/drawingml/2006/main">
-            <a:r>
-              <a:t/>
-            </a:r>
-          </a:p>
-          <a:p xmlns:a="http://schemas.openxmlformats.org/drawingml/2006/main">
-            <a:r>
-              <a:t>学生动作：</a:t>
-            </a:r>
-          </a:p>
-          <a:p xmlns:a="http://schemas.openxmlformats.org/drawingml/2006/main">
-            <a:r>
-              <a:t/>
-            </a:r>
-          </a:p>
-          <a:p xmlns:a="http://schemas.openxmlformats.org/drawingml/2006/main">
-            <a:r>
-              <a:t/>
-            </a:r>
-          </a:p>
-          <a:p xmlns:a="http://schemas.openxmlformats.org/drawingml/2006/main">
-            <a:r>
-              <a:t>来源与边界：</a:t>
-            </a:r>
-          </a:p>
-          <a:p xmlns:a="http://schemas.openxmlformats.org/drawingml/2006/main">
-            <a:r>
-              <a:t>assessment.md 学术规范；讲义 §七—八。</a:t>
-            </a:r>
-          </a:p>
-          <a:p xmlns:a="http://schemas.openxmlformats.org/drawingml/2006/main">
-            <a:r>
-              <a:t/>
-            </a:r>
-          </a:p>
-          <a:p xmlns:a="http://schemas.openxmlformats.org/drawingml/2006/main">
-            <a:r>
               <a:t>[Sources]</a:t>
             </a:r>
           </a:p>
           <a:p xmlns:a="http://schemas.openxmlformats.org/drawingml/2006/main">
             <a:r>
-              <a:t/>
-            </a:r>
-          </a:p>
-          <a:p xmlns:a="http://schemas.openxmlformats.org/drawingml/2006/main">
-            <a:r>
-              <a:t>- 本课 handout.md 与 slides.md</a:t>
-            </a:r>
-          </a:p>
-          <a:p xmlns:a="http://schemas.openxmlformats.org/drawingml/2006/main">
-            <a:r>
-              <a:t/>
-            </a:r>
-          </a:p>
-          <a:p xmlns:a="http://schemas.openxmlformats.org/drawingml/2006/main">
-            <a:r>
-              <a:t>- ../../course/reading-card-case.md</a:t>
-            </a:r>
-          </a:p>
-          <a:p xmlns:a="http://schemas.openxmlformats.org/drawingml/2006/main">
-            <a:r>
-              <a:t/>
+              <a:t>本课 handout.md、judgment-task.md；../../course/judgment-path.md。</a:t>
             </a:r>
           </a:p>
           <a:p xmlns:a="http://schemas.openxmlformats.org/drawingml/2006/main">
@@ -2699,7 +1849,7 @@
           </a:p>
           <a:p xmlns:a="http://schemas.openxmlformats.org/drawingml/2006/main">
             <a:r>
-              <a:t>讲义位置：本课讲义；见逐页母稿映射表</a:t>
+              <a:t>讲述与校准：</a:t>
             </a:r>
           </a:p>
           <a:p xmlns:a="http://schemas.openxmlformats.org/drawingml/2006/main">
@@ -2709,72 +1859,17 @@
           </a:p>
           <a:p xmlns:a="http://schemas.openxmlformats.org/drawingml/2006/main">
             <a:r>
-              <a:t>屏显核对：</a:t>
-            </a:r>
-          </a:p>
-          <a:p xmlns:a="http://schemas.openxmlformats.org/drawingml/2006/main">
-            <a:r>
-              <a:t>1. 报告完整</a:t>
-            </a:r>
-          </a:p>
-          <a:p xmlns:a="http://schemas.openxmlformats.org/drawingml/2006/main">
-            <a:r>
-              <a:t>2. 表图可追溯</a:t>
-            </a:r>
-          </a:p>
-          <a:p xmlns:a="http://schemas.openxmlformats.org/drawingml/2006/main">
-            <a:r>
-              <a:t>3. 有效性或等价威胁</a:t>
-            </a:r>
-          </a:p>
-          <a:p xmlns:a="http://schemas.openxmlformats.org/drawingml/2006/main">
-            <a:r>
-              <a:t>4. 反馈已逐条处理</a:t>
-            </a:r>
-          </a:p>
-          <a:p xmlns:a="http://schemas.openxmlformats.org/drawingml/2006/main">
-            <a:r>
-              <a:t>5. 关键结论绑定证据与上游判断</a:t>
-            </a:r>
-          </a:p>
-          <a:p xmlns:a="http://schemas.openxmlformats.org/drawingml/2006/main">
-            <a:r>
-              <a:t>6. `stable` 证据条件满足，否则降级</a:t>
-            </a:r>
-          </a:p>
-          <a:p xmlns:a="http://schemas.openxmlformats.org/drawingml/2006/main">
-            <a:r>
-              <a:t>7. 工作流含运行、权限、评价、失败</a:t>
-            </a:r>
-          </a:p>
-          <a:p xmlns:a="http://schemas.openxmlformats.org/drawingml/2006/main">
-            <a:r>
-              <a:t>8. 伦理、许可、贡献与 AI 披露完整</a:t>
-            </a:r>
-          </a:p>
-          <a:p xmlns:a="http://schemas.openxmlformats.org/drawingml/2006/main">
-            <a:r>
-              <a:t>9. 工件状态与门检查一致</a:t>
-            </a:r>
-          </a:p>
-          <a:p xmlns:a="http://schemas.openxmlformats.org/drawingml/2006/main">
-            <a:r>
-              <a:t>10. 展示、抽查与复盘完成</a:t>
-            </a:r>
-          </a:p>
-          <a:p xmlns:a="http://schemas.openxmlformats.org/drawingml/2006/main">
-            <a:r>
               <a:t/>
             </a:r>
           </a:p>
           <a:p xmlns:a="http://schemas.openxmlformats.org/drawingml/2006/main">
             <a:r>
-              <a:t>教师讲述：</a:t>
-            </a:r>
-          </a:p>
-          <a:p xmlns:a="http://schemas.openxmlformats.org/drawingml/2006/main">
-            <a:r>
-              <a:t>此页不新增规则；逐项以 assignments.md 为权威。</a:t>
+              <a:t>学生动作：</a:t>
+            </a:r>
+          </a:p>
+          <a:p xmlns:a="http://schemas.openxmlformats.org/drawingml/2006/main">
+            <a:r>
+              <a:t>依据本页方法检查本人项目；按需参考。</a:t>
             </a:r>
           </a:p>
           <a:p xmlns:a="http://schemas.openxmlformats.org/drawingml/2006/main">
@@ -2784,7 +1879,7 @@
           </a:p>
           <a:p xmlns:a="http://schemas.openxmlformats.org/drawingml/2006/main">
             <a:r>
-              <a:t>学生动作：</a:t>
+              <a:t>课堂安排：按 teaching-plan.md 专用课堂时段安排；换场计入对应时段。</a:t>
             </a:r>
           </a:p>
           <a:p xmlns:a="http://schemas.openxmlformats.org/drawingml/2006/main">
@@ -2794,52 +1889,12 @@
           </a:p>
           <a:p xmlns:a="http://schemas.openxmlformats.org/drawingml/2006/main">
             <a:r>
-              <a:t/>
-            </a:r>
-          </a:p>
-          <a:p xmlns:a="http://schemas.openxmlformats.org/drawingml/2006/main">
-            <a:r>
-              <a:t>来源与边界：</a:t>
-            </a:r>
-          </a:p>
-          <a:p xmlns:a="http://schemas.openxmlformats.org/drawingml/2006/main">
-            <a:r>
-              <a:t>assignments.md Checkpoint 4；讲义 §八。</a:t>
-            </a:r>
-          </a:p>
-          <a:p xmlns:a="http://schemas.openxmlformats.org/drawingml/2006/main">
-            <a:r>
-              <a:t/>
-            </a:r>
-          </a:p>
-          <a:p xmlns:a="http://schemas.openxmlformats.org/drawingml/2006/main">
-            <a:r>
               <a:t>[Sources]</a:t>
             </a:r>
           </a:p>
           <a:p xmlns:a="http://schemas.openxmlformats.org/drawingml/2006/main">
             <a:r>
-              <a:t/>
-            </a:r>
-          </a:p>
-          <a:p xmlns:a="http://schemas.openxmlformats.org/drawingml/2006/main">
-            <a:r>
-              <a:t>- 本课 handout.md 与 slides.md</a:t>
-            </a:r>
-          </a:p>
-          <a:p xmlns:a="http://schemas.openxmlformats.org/drawingml/2006/main">
-            <a:r>
-              <a:t/>
-            </a:r>
-          </a:p>
-          <a:p xmlns:a="http://schemas.openxmlformats.org/drawingml/2006/main">
-            <a:r>
-              <a:t>- ../../course/reading-card-case.md</a:t>
-            </a:r>
-          </a:p>
-          <a:p xmlns:a="http://schemas.openxmlformats.org/drawingml/2006/main">
-            <a:r>
-              <a:t/>
+              <a:t>本课 handout.md、judgment-task.md；../../course/judgment-path.md。</a:t>
             </a:r>
           </a:p>
           <a:p xmlns:a="http://schemas.openxmlformats.org/drawingml/2006/main">
@@ -6805,97 +5860,22 @@
       </p:grpSpPr>
       <p:sp>
         <p:nvSpPr>
-          <p:cNvPr id="4" name="Text Placeholder 3">
-            <a:extLst xmlns:a="http://schemas.openxmlformats.org/drawingml/2006/main">
-              <a:ext uri="{FF2B5EF4-FFF2-40B4-BE49-F238E27FC236}">
-                <a16:creationId xmlns:a16="http://schemas.microsoft.com/office/drawing/2014/main" id="{4D941B40-7A0A-534E-3563-CA11753C8E3F}"/>
-              </a:ext>
-            </a:extLst>
-          </p:cNvPr>
-          <p:cNvSpPr>
-            <a:spLocks xmlns:a="http://schemas.openxmlformats.org/drawingml/2006/main" noGrp="1"/>
-          </p:cNvSpPr>
-          <p:nvPr>
-            <p:ph type="body" idx="14"/>
-          </p:nvPr>
-        </p:nvSpPr>
-        <p:spPr>
-          <a:xfrm xmlns:a="http://schemas.openxmlformats.org/drawingml/2006/main">
-            <a:off x="1028700" y="57150"/>
-            <a:ext cx="10668000" cy="571500"/>
-          </a:xfrm>
-        </p:spPr>
-        <p:txBody>
-          <a:bodyPr xmlns:a="http://schemas.openxmlformats.org/drawingml/2006/main" lIns="0" tIns="0" rIns="0" bIns="0" anchor="ctr"/>
-          <a:lstStyle xmlns:a="http://schemas.openxmlformats.org/drawingml/2006/main"/>
-          <a:p xmlns:a="http://schemas.openxmlformats.org/drawingml/2006/main">
-            <a:pPr algn="l">
-              <a:lnSpc>
-                <a:spcPct val="118000"/>
-              </a:lnSpc>
-              <a:buNone/>
-            </a:pPr>
-            <a:r>
-              <a:rPr sz="3000" b="1">
-                <a:solidFill>
-                  <a:srgbClr val="FFFFFF"/>
-                </a:solidFill>
-                <a:latin typeface="微软雅黑"/>
-                <a:ea typeface="微软雅黑"/>
-                <a:cs typeface="微软雅黑"/>
-              </a:rPr>
-              <a:t>提交、修复与课程收束</a:t>
-            </a:r>
-            <a:endParaRPr/>
-          </a:p>
-        </p:txBody>
-      </p:sp>
-      <p:sp>
-        <p:nvSpPr>
-          <p:cNvPr id="5" name="Slide Number Placeholder 4">
-            <a:extLst xmlns:a="http://schemas.openxmlformats.org/drawingml/2006/main">
-              <a:ext uri="{FF2B5EF4-FFF2-40B4-BE49-F238E27FC236}">
-                <a16:creationId xmlns:a16="http://schemas.microsoft.com/office/drawing/2014/main" id="{EBA5909F-738E-F60C-BE8C-B3F1D94548E5}"/>
-              </a:ext>
-            </a:extLst>
-          </p:cNvPr>
-          <p:cNvSpPr>
-            <a:spLocks xmlns:a="http://schemas.openxmlformats.org/drawingml/2006/main" noGrp="1"/>
-          </p:cNvSpPr>
-          <p:nvPr>
-            <p:ph type="sldNum" idx="10"/>
-          </p:nvPr>
-        </p:nvSpPr>
-        <p:spPr/>
-        <p:txBody>
-          <a:bodyPr xmlns:a="http://schemas.openxmlformats.org/drawingml/2006/main"/>
-          <a:lstStyle xmlns:a="http://schemas.openxmlformats.org/drawingml/2006/main"/>
-          <a:p xmlns:a="http://schemas.openxmlformats.org/drawingml/2006/main">
-            <a:fld id="{4DB16885-0D3F-A391-B669-3211DB3B26E8}" type="slidenum">
-              <a:t>12</a:t>
-            </a:fld>
-            <a:endParaRPr/>
-          </a:p>
-        </p:txBody>
-      </p:sp>
-      <p:sp>
-        <p:nvSpPr>
-          <p:cNvPr id="6" name="content-175">
-            <a:extLst xmlns:a="http://schemas.openxmlformats.org/drawingml/2006/main">
-              <a:ext uri="{FF2B5EF4-FFF2-40B4-BE49-F238E27FC236}">
-                <a16:creationId xmlns:a16="http://schemas.microsoft.com/office/drawing/2014/main" id="{F60F9869-48C8-4410-8DA0-C0F634F2C85E}"/>
-              </a:ext>
-            </a:extLst>
-          </p:cNvPr>
-          <p:cNvSpPr>
-            <a:spLocks xmlns:a="http://schemas.openxmlformats.org/drawingml/2006/main" noGrp="1"/>
-          </p:cNvSpPr>
-          <p:nvPr/>
-        </p:nvSpPr>
-        <p:spPr>
-          <a:xfrm xmlns:a="http://schemas.openxmlformats.org/drawingml/2006/main">
-            <a:off x="609600" y="1571625"/>
-            <a:ext cx="10972800" cy="432435"/>
+          <p:cNvPr id="7" name="judgment-title">
+            <a:extLst xmlns:a="http://schemas.openxmlformats.org/drawingml/2006/main">
+              <a:ext uri="{FF2B5EF4-FFF2-40B4-BE49-F238E27FC236}">
+                <a16:creationId xmlns:a16="http://schemas.microsoft.com/office/drawing/2014/main" id="{E161DCA4-A785-46EB-B075-AF65F36A2C3F}"/>
+              </a:ext>
+            </a:extLst>
+          </p:cNvPr>
+          <p:cNvSpPr>
+            <a:spLocks xmlns:a="http://schemas.openxmlformats.org/drawingml/2006/main" noGrp="1"/>
+          </p:cNvSpPr>
+          <p:nvPr/>
+        </p:nvSpPr>
+        <p:spPr>
+          <a:xfrm xmlns:a="http://schemas.openxmlformats.org/drawingml/2006/main">
+            <a:off x="1028700" y="76200"/>
+            <a:ext cx="10687050" cy="514350"/>
           </a:xfrm>
           <a:prstGeom xmlns:a="http://schemas.openxmlformats.org/drawingml/2006/main" prst="rect">
             <a:avLst/>
@@ -6907,16 +5887,23 @@
         </p:spPr>
         <p:txBody>
           <a:bodyPr xmlns:a="http://schemas.openxmlformats.org/drawingml/2006/main" lIns="0" tIns="0" rIns="0" bIns="0" anchor="t"/>
-          <a:lstStyle xmlns:a="http://schemas.openxmlformats.org/drawingml/2006/main"/>
+          <a:lstStyle xmlns:a="http://schemas.openxmlformats.org/drawingml/2006/main">
+            <a:defPPr algn="l">
+              <a:defRPr sz="3000" b="1">
+                <a:solidFill>
+                  <a:srgbClr val="FFFFFF"/>
+                </a:solidFill>
+                <a:latin typeface="微软雅黑"/>
+                <a:ea typeface="微软雅黑"/>
+                <a:cs typeface="微软雅黑"/>
+              </a:defRPr>
+            </a:defPPr>
+          </a:lstStyle>
           <a:p xmlns:a="http://schemas.openxmlformats.org/drawingml/2006/main">
             <a:pPr algn="l">
-              <a:lnSpc>
-                <a:spcPct val="118000"/>
-              </a:lnSpc>
-              <a:buNone/>
-              <a:defRPr sz="2400" b="0">
-                <a:solidFill>
-                  <a:srgbClr val="27333D"/>
+              <a:defRPr sz="3000" b="1">
+                <a:solidFill>
+                  <a:srgbClr val="FFFFFF"/>
                 </a:solidFill>
                 <a:latin typeface="微软雅黑"/>
                 <a:ea typeface="微软雅黑"/>
@@ -6924,37 +5911,37 @@
               </a:defRPr>
             </a:pPr>
             <a:r>
-              <a:rPr sz="2400" b="0">
-                <a:solidFill>
-                  <a:srgbClr val="27333D"/>
+              <a:rPr sz="3000" b="1">
+                <a:solidFill>
+                  <a:srgbClr val="FFFFFF"/>
                 </a:solidFill>
                 <a:latin typeface="微软雅黑"/>
                 <a:ea typeface="微软雅黑"/>
                 <a:cs typeface="微软雅黑"/>
               </a:rPr>
-              <a:t>提交当前个人项目版本：链接、tag 或压缩包</a:t>
-            </a:r>
-          </a:p>
-        </p:txBody>
-      </p:sp>
-      <p:sp>
-        <p:nvSpPr>
-          <p:cNvPr id="7" name="content-176">
-            <a:extLst xmlns:a="http://schemas.openxmlformats.org/drawingml/2006/main">
-              <a:ext uri="{FF2B5EF4-FFF2-40B4-BE49-F238E27FC236}">
-                <a16:creationId xmlns:a16="http://schemas.microsoft.com/office/drawing/2014/main" id="{E1A5E2F4-C3B2-4DA6-8809-61D15EABDA14}"/>
-              </a:ext>
-            </a:extLst>
-          </p:cNvPr>
-          <p:cNvSpPr>
-            <a:spLocks xmlns:a="http://schemas.openxmlformats.org/drawingml/2006/main" noGrp="1"/>
-          </p:cNvSpPr>
-          <p:nvPr/>
-        </p:nvSpPr>
-        <p:spPr>
-          <a:xfrm xmlns:a="http://schemas.openxmlformats.org/drawingml/2006/main">
-            <a:off x="609600" y="2261235"/>
-            <a:ext cx="10972800" cy="432435"/>
+              <a:t>最终提交与未决问题</a:t>
+            </a:r>
+          </a:p>
+        </p:txBody>
+      </p:sp>
+      <p:sp>
+        <p:nvSpPr>
+          <p:cNvPr id="2" name="judgment-body-0">
+            <a:extLst xmlns:a="http://schemas.openxmlformats.org/drawingml/2006/main">
+              <a:ext uri="{FF2B5EF4-FFF2-40B4-BE49-F238E27FC236}">
+                <a16:creationId xmlns:a16="http://schemas.microsoft.com/office/drawing/2014/main" id="{C9BFB805-2CD9-416A-A24B-5C514E2E1069}"/>
+              </a:ext>
+            </a:extLst>
+          </p:cNvPr>
+          <p:cNvSpPr>
+            <a:spLocks xmlns:a="http://schemas.openxmlformats.org/drawingml/2006/main" noGrp="1"/>
+          </p:cNvSpPr>
+          <p:nvPr/>
+        </p:nvSpPr>
+        <p:spPr>
+          <a:xfrm xmlns:a="http://schemas.openxmlformats.org/drawingml/2006/main">
+            <a:off x="666750" y="1066800"/>
+            <a:ext cx="10858500" cy="1009650"/>
           </a:xfrm>
           <a:prstGeom xmlns:a="http://schemas.openxmlformats.org/drawingml/2006/main" prst="rect">
             <a:avLst/>
@@ -6966,16 +5953,23 @@
         </p:spPr>
         <p:txBody>
           <a:bodyPr xmlns:a="http://schemas.openxmlformats.org/drawingml/2006/main" lIns="0" tIns="0" rIns="0" bIns="0" anchor="t"/>
-          <a:lstStyle xmlns:a="http://schemas.openxmlformats.org/drawingml/2006/main"/>
+          <a:lstStyle xmlns:a="http://schemas.openxmlformats.org/drawingml/2006/main">
+            <a:defPPr algn="l">
+              <a:defRPr sz="2400" b="0">
+                <a:solidFill>
+                  <a:srgbClr val="263746"/>
+                </a:solidFill>
+                <a:latin typeface="微软雅黑"/>
+                <a:ea typeface="微软雅黑"/>
+                <a:cs typeface="微软雅黑"/>
+              </a:defRPr>
+            </a:defPPr>
+          </a:lstStyle>
           <a:p xmlns:a="http://schemas.openxmlformats.org/drawingml/2006/main">
             <a:pPr algn="l">
-              <a:lnSpc>
-                <a:spcPct val="118000"/>
-              </a:lnSpc>
-              <a:buNone/>
               <a:defRPr sz="2400" b="0">
                 <a:solidFill>
-                  <a:srgbClr val="27333D"/>
+                  <a:srgbClr val="263746"/>
                 </a:solidFill>
                 <a:latin typeface="微软雅黑"/>
                 <a:ea typeface="微软雅黑"/>
@@ -6985,35 +5979,35 @@
             <a:r>
               <a:rPr sz="2400" b="0">
                 <a:solidFill>
-                  <a:srgbClr val="27333D"/>
+                  <a:srgbClr val="263746"/>
                 </a:solidFill>
                 <a:latin typeface="微软雅黑"/>
                 <a:ea typeface="微软雅黑"/>
                 <a:cs typeface="微软雅黑"/>
               </a:rPr>
-              <a:t>局部缺口：按教师指定期限修复并复查</a:t>
-            </a:r>
-          </a:p>
-        </p:txBody>
-      </p:sp>
-      <p:sp>
-        <p:nvSpPr>
-          <p:cNvPr id="8" name="content-177">
-            <a:extLst xmlns:a="http://schemas.openxmlformats.org/drawingml/2006/main">
-              <a:ext uri="{FF2B5EF4-FFF2-40B4-BE49-F238E27FC236}">
-                <a16:creationId xmlns:a16="http://schemas.microsoft.com/office/drawing/2014/main" id="{5FDB883D-17BD-41E4-BA1D-D2ABFAF18043}"/>
-              </a:ext>
-            </a:extLst>
-          </p:cNvPr>
-          <p:cNvSpPr>
-            <a:spLocks xmlns:a="http://schemas.openxmlformats.org/drawingml/2006/main" noGrp="1"/>
-          </p:cNvSpPr>
-          <p:nvPr/>
-        </p:nvSpPr>
-        <p:spPr>
-          <a:xfrm xmlns:a="http://schemas.openxmlformats.org/drawingml/2006/main">
-            <a:off x="609600" y="2950845"/>
-            <a:ext cx="10972800" cy="432435"/>
+              <a:t>课程收束；仅修明确反馈缺口，不新增研究任务。</a:t>
+            </a:r>
+          </a:p>
+        </p:txBody>
+      </p:sp>
+      <p:sp>
+        <p:nvSpPr>
+          <p:cNvPr id="3" name="judgment-body-1">
+            <a:extLst xmlns:a="http://schemas.openxmlformats.org/drawingml/2006/main">
+              <a:ext uri="{FF2B5EF4-FFF2-40B4-BE49-F238E27FC236}">
+                <a16:creationId xmlns:a16="http://schemas.microsoft.com/office/drawing/2014/main" id="{57D5308E-01BA-473B-84B6-84070527CA02}"/>
+              </a:ext>
+            </a:extLst>
+          </p:cNvPr>
+          <p:cNvSpPr>
+            <a:spLocks xmlns:a="http://schemas.openxmlformats.org/drawingml/2006/main" noGrp="1"/>
+          </p:cNvSpPr>
+          <p:nvPr/>
+        </p:nvSpPr>
+        <p:spPr>
+          <a:xfrm xmlns:a="http://schemas.openxmlformats.org/drawingml/2006/main">
+            <a:off x="666750" y="2238375"/>
+            <a:ext cx="10858500" cy="2076450"/>
           </a:xfrm>
           <a:prstGeom xmlns:a="http://schemas.openxmlformats.org/drawingml/2006/main" prst="rect">
             <a:avLst/>
@@ -7025,16 +6019,23 @@
         </p:spPr>
         <p:txBody>
           <a:bodyPr xmlns:a="http://schemas.openxmlformats.org/drawingml/2006/main" lIns="0" tIns="0" rIns="0" bIns="0" anchor="t"/>
-          <a:lstStyle xmlns:a="http://schemas.openxmlformats.org/drawingml/2006/main"/>
+          <a:lstStyle xmlns:a="http://schemas.openxmlformats.org/drawingml/2006/main">
+            <a:defPPr algn="l">
+              <a:defRPr sz="2400" b="0">
+                <a:solidFill>
+                  <a:srgbClr val="263746"/>
+                </a:solidFill>
+                <a:latin typeface="微软雅黑"/>
+                <a:ea typeface="微软雅黑"/>
+                <a:cs typeface="微软雅黑"/>
+              </a:defRPr>
+            </a:defPPr>
+          </a:lstStyle>
           <a:p xmlns:a="http://schemas.openxmlformats.org/drawingml/2006/main">
             <a:pPr algn="l">
-              <a:lnSpc>
-                <a:spcPct val="118000"/>
-              </a:lnSpc>
-              <a:buNone/>
               <a:defRPr sz="2400" b="0">
                 <a:solidFill>
-                  <a:srgbClr val="27333D"/>
+                  <a:srgbClr val="263746"/>
                 </a:solidFill>
                 <a:latin typeface="微软雅黑"/>
                 <a:ea typeface="微软雅黑"/>
@@ -7044,35 +6045,35 @@
             <a:r>
               <a:rPr sz="2400" b="0">
                 <a:solidFill>
-                  <a:srgbClr val="27333D"/>
+                  <a:srgbClr val="263746"/>
                 </a:solidFill>
                 <a:latin typeface="微软雅黑"/>
                 <a:ea typeface="微软雅黑"/>
                 <a:cs typeface="微软雅黑"/>
               </a:rPr>
-              <a:t>红线情形：不适用普通修订机制</a:t>
-            </a:r>
-          </a:p>
-        </p:txBody>
-      </p:sp>
-      <p:sp>
-        <p:nvSpPr>
-          <p:cNvPr id="9" name="content-178">
-            <a:extLst xmlns:a="http://schemas.openxmlformats.org/drawingml/2006/main">
-              <a:ext uri="{FF2B5EF4-FFF2-40B4-BE49-F238E27FC236}">
-                <a16:creationId xmlns:a16="http://schemas.microsoft.com/office/drawing/2014/main" id="{BE0A8CFF-44DA-46FB-920D-CCB6B52D5A8B}"/>
-              </a:ext>
-            </a:extLst>
-          </p:cNvPr>
-          <p:cNvSpPr>
-            <a:spLocks xmlns:a="http://schemas.openxmlformats.org/drawingml/2006/main" noGrp="1"/>
-          </p:cNvSpPr>
-          <p:nvPr/>
-        </p:nvSpPr>
-        <p:spPr>
-          <a:xfrm xmlns:a="http://schemas.openxmlformats.org/drawingml/2006/main">
-            <a:off x="609600" y="3640455"/>
-            <a:ext cx="10972800" cy="798195"/>
+              <a:t>回写已有项目：论证门与最终个人项目：报告、工作流、原始证据与复盘</a:t>
+            </a:r>
+          </a:p>
+        </p:txBody>
+      </p:sp>
+      <p:sp>
+        <p:nvSpPr>
+          <p:cNvPr id="4" name="judgment-body-2">
+            <a:extLst xmlns:a="http://schemas.openxmlformats.org/drawingml/2006/main">
+              <a:ext uri="{FF2B5EF4-FFF2-40B4-BE49-F238E27FC236}">
+                <a16:creationId xmlns:a16="http://schemas.microsoft.com/office/drawing/2014/main" id="{EFB5389B-BAA6-4A50-A741-20EA6934205B}"/>
+              </a:ext>
+            </a:extLst>
+          </p:cNvPr>
+          <p:cNvSpPr>
+            <a:spLocks xmlns:a="http://schemas.openxmlformats.org/drawingml/2006/main" noGrp="1"/>
+          </p:cNvSpPr>
+          <p:nvPr/>
+        </p:nvSpPr>
+        <p:spPr>
+          <a:xfrm xmlns:a="http://schemas.openxmlformats.org/drawingml/2006/main">
+            <a:off x="666750" y="4495800"/>
+            <a:ext cx="10858500" cy="1409700"/>
           </a:xfrm>
           <a:prstGeom xmlns:a="http://schemas.openxmlformats.org/drawingml/2006/main" prst="rect">
             <a:avLst/>
@@ -7084,14 +6085,21 @@
         </p:spPr>
         <p:txBody>
           <a:bodyPr xmlns:a="http://schemas.openxmlformats.org/drawingml/2006/main" lIns="0" tIns="0" rIns="0" bIns="0" anchor="t"/>
-          <a:lstStyle xmlns:a="http://schemas.openxmlformats.org/drawingml/2006/main"/>
+          <a:lstStyle xmlns:a="http://schemas.openxmlformats.org/drawingml/2006/main">
+            <a:defPPr algn="l">
+              <a:defRPr sz="2200" b="0">
+                <a:solidFill>
+                  <a:srgbClr val="1F4D78"/>
+                </a:solidFill>
+                <a:latin typeface="微软雅黑"/>
+                <a:ea typeface="微软雅黑"/>
+                <a:cs typeface="微软雅黑"/>
+              </a:defRPr>
+            </a:defPPr>
+          </a:lstStyle>
           <a:p xmlns:a="http://schemas.openxmlformats.org/drawingml/2006/main">
             <a:pPr algn="l">
-              <a:lnSpc>
-                <a:spcPct val="118000"/>
-              </a:lnSpc>
-              <a:buNone/>
-              <a:defRPr sz="2400" b="0">
+              <a:defRPr sz="2200" b="0">
                 <a:solidFill>
                   <a:srgbClr val="1F4D78"/>
                 </a:solidFill>
@@ -7101,7 +6109,7 @@
               </a:defRPr>
             </a:pPr>
             <a:r>
-              <a:rPr sz="2400" b="0">
+              <a:rPr sz="2200" b="0">
                 <a:solidFill>
                   <a:srgbClr val="1F4D78"/>
                 </a:solidFill>
@@ -7109,7 +6117,139 @@
                 <a:ea typeface="微软雅黑"/>
                 <a:cs typeface="微软雅黑"/>
               </a:rPr>
-              <a:t>问题仍由研究者定义，证据仍可核验，实验仍可复现，结论仍有边界，责任仍由人承担。</a:t>
+              <a:t>研究门材料按既定预算整理提交；不叠加新必读。</a:t>
+            </a:r>
+          </a:p>
+        </p:txBody>
+      </p:sp>
+      <p:sp>
+        <p:nvSpPr>
+          <p:cNvPr id="5" name="judgment-source">
+            <a:extLst xmlns:a="http://schemas.openxmlformats.org/drawingml/2006/main">
+              <a:ext uri="{FF2B5EF4-FFF2-40B4-BE49-F238E27FC236}">
+                <a16:creationId xmlns:a16="http://schemas.microsoft.com/office/drawing/2014/main" id="{52244F12-92FB-4762-9EAF-7076994F30B0}"/>
+              </a:ext>
+            </a:extLst>
+          </p:cNvPr>
+          <p:cNvSpPr>
+            <a:spLocks xmlns:a="http://schemas.openxmlformats.org/drawingml/2006/main" noGrp="1"/>
+          </p:cNvSpPr>
+          <p:nvPr/>
+        </p:nvSpPr>
+        <p:spPr>
+          <a:xfrm xmlns:a="http://schemas.openxmlformats.org/drawingml/2006/main">
+            <a:off x="666750" y="6276975"/>
+            <a:ext cx="10572750" cy="209550"/>
+          </a:xfrm>
+          <a:prstGeom xmlns:a="http://schemas.openxmlformats.org/drawingml/2006/main" prst="rect">
+            <a:avLst/>
+          </a:prstGeom>
+          <a:noFill xmlns:a="http://schemas.openxmlformats.org/drawingml/2006/main"/>
+          <a:ln xmlns:a="http://schemas.openxmlformats.org/drawingml/2006/main" w="0">
+            <a:noFill/>
+          </a:ln>
+        </p:spPr>
+        <p:txBody>
+          <a:bodyPr xmlns:a="http://schemas.openxmlformats.org/drawingml/2006/main" lIns="0" tIns="0" rIns="0" bIns="0" anchor="t"/>
+          <a:lstStyle xmlns:a="http://schemas.openxmlformats.org/drawingml/2006/main">
+            <a:defPPr algn="l">
+              <a:defRPr sz="1100" b="0">
+                <a:solidFill>
+                  <a:srgbClr val="667684"/>
+                </a:solidFill>
+                <a:latin typeface="微软雅黑"/>
+                <a:ea typeface="微软雅黑"/>
+                <a:cs typeface="微软雅黑"/>
+              </a:defRPr>
+            </a:defPPr>
+          </a:lstStyle>
+          <a:p xmlns:a="http://schemas.openxmlformats.org/drawingml/2006/main">
+            <a:pPr algn="l">
+              <a:defRPr sz="1100" b="0">
+                <a:solidFill>
+                  <a:srgbClr val="667684"/>
+                </a:solidFill>
+                <a:latin typeface="微软雅黑"/>
+                <a:ea typeface="微软雅黑"/>
+                <a:cs typeface="微软雅黑"/>
+              </a:defRPr>
+            </a:pPr>
+            <a:r>
+              <a:rPr sz="1100" b="0">
+                <a:solidFill>
+                  <a:srgbClr val="667684"/>
+                </a:solidFill>
+                <a:latin typeface="微软雅黑"/>
+                <a:ea typeface="微软雅黑"/>
+                <a:cs typeface="微软雅黑"/>
+              </a:rPr>
+              <a:t>来源：本课判断任务与讲义；构造材料及真实来源按材料包标识</a:t>
+            </a:r>
+          </a:p>
+        </p:txBody>
+      </p:sp>
+      <p:sp>
+        <p:nvSpPr>
+          <p:cNvPr id="6" name="judgment-page">
+            <a:extLst xmlns:a="http://schemas.openxmlformats.org/drawingml/2006/main">
+              <a:ext uri="{FF2B5EF4-FFF2-40B4-BE49-F238E27FC236}">
+                <a16:creationId xmlns:a16="http://schemas.microsoft.com/office/drawing/2014/main" id="{F159199A-7CE7-49B5-9BAE-9A423DE59323}"/>
+              </a:ext>
+            </a:extLst>
+          </p:cNvPr>
+          <p:cNvSpPr>
+            <a:spLocks xmlns:a="http://schemas.openxmlformats.org/drawingml/2006/main" noGrp="1"/>
+          </p:cNvSpPr>
+          <p:nvPr/>
+        </p:nvSpPr>
+        <p:spPr>
+          <a:xfrm xmlns:a="http://schemas.openxmlformats.org/drawingml/2006/main">
+            <a:off x="11715750" y="6562725"/>
+            <a:ext cx="238125" cy="171450"/>
+          </a:xfrm>
+          <a:prstGeom xmlns:a="http://schemas.openxmlformats.org/drawingml/2006/main" prst="rect">
+            <a:avLst/>
+          </a:prstGeom>
+          <a:noFill xmlns:a="http://schemas.openxmlformats.org/drawingml/2006/main"/>
+          <a:ln xmlns:a="http://schemas.openxmlformats.org/drawingml/2006/main" w="0">
+            <a:noFill/>
+          </a:ln>
+        </p:spPr>
+        <p:txBody>
+          <a:bodyPr xmlns:a="http://schemas.openxmlformats.org/drawingml/2006/main" lIns="0" tIns="0" rIns="0" bIns="0" anchor="t"/>
+          <a:lstStyle xmlns:a="http://schemas.openxmlformats.org/drawingml/2006/main">
+            <a:defPPr algn="l">
+              <a:defRPr sz="900" b="0">
+                <a:solidFill>
+                  <a:srgbClr val="A5A5A5"/>
+                </a:solidFill>
+                <a:latin typeface="微软雅黑"/>
+                <a:ea typeface="微软雅黑"/>
+                <a:cs typeface="微软雅黑"/>
+              </a:defRPr>
+            </a:defPPr>
+          </a:lstStyle>
+          <a:p xmlns:a="http://schemas.openxmlformats.org/drawingml/2006/main">
+            <a:pPr algn="l">
+              <a:defRPr sz="900" b="0">
+                <a:solidFill>
+                  <a:srgbClr val="A5A5A5"/>
+                </a:solidFill>
+                <a:latin typeface="微软雅黑"/>
+                <a:ea typeface="微软雅黑"/>
+                <a:cs typeface="微软雅黑"/>
+              </a:defRPr>
+            </a:pPr>
+            <a:r>
+              <a:rPr sz="900" b="0">
+                <a:solidFill>
+                  <a:srgbClr val="A5A5A5"/>
+                </a:solidFill>
+                <a:latin typeface="微软雅黑"/>
+                <a:ea typeface="微软雅黑"/>
+                <a:cs typeface="微软雅黑"/>
+              </a:rPr>
+              <a:t>12</a:t>
             </a:r>
           </a:p>
         </p:txBody>
@@ -8855,127 +7995,22 @@
       </p:grpSpPr>
       <p:sp>
         <p:nvSpPr>
-          <p:cNvPr id="4" name="Text Placeholder 3">
-            <a:extLst xmlns:a="http://schemas.openxmlformats.org/drawingml/2006/main">
-              <a:ext uri="{FF2B5EF4-FFF2-40B4-BE49-F238E27FC236}">
-                <a16:creationId xmlns:a16="http://schemas.microsoft.com/office/drawing/2014/main" id="{4D941B40-7A0A-534E-3563-CA11753C8E3F}"/>
-              </a:ext>
-            </a:extLst>
-          </p:cNvPr>
-          <p:cNvSpPr>
-            <a:spLocks xmlns:a="http://schemas.openxmlformats.org/drawingml/2006/main" noGrp="1"/>
-          </p:cNvSpPr>
-          <p:nvPr>
-            <p:ph type="body" idx="14"/>
-          </p:nvPr>
-        </p:nvSpPr>
-        <p:spPr>
-          <a:xfrm xmlns:a="http://schemas.openxmlformats.org/drawingml/2006/main">
-            <a:off x="1028700" y="57150"/>
-            <a:ext cx="10668000" cy="571500"/>
-          </a:xfrm>
-        </p:spPr>
-        <p:txBody>
-          <a:bodyPr xmlns:a="http://schemas.openxmlformats.org/drawingml/2006/main" lIns="0" tIns="0" rIns="0" bIns="0" anchor="ctr"/>
-          <a:lstStyle xmlns:a="http://schemas.openxmlformats.org/drawingml/2006/main"/>
-          <a:p xmlns:a="http://schemas.openxmlformats.org/drawingml/2006/main">
-            <a:pPr algn="l">
-              <a:lnSpc>
-                <a:spcPct val="118000"/>
-              </a:lnSpc>
-              <a:buNone/>
-            </a:pPr>
-            <a:r>
-              <a:rPr sz="3000" b="1">
-                <a:solidFill>
-                  <a:srgbClr val="FFFFFF"/>
-                </a:solidFill>
-                <a:latin typeface="微软雅黑"/>
-                <a:ea typeface="微软雅黑"/>
-                <a:cs typeface="微软雅黑"/>
-              </a:rPr>
-              <a:t>证据追踪演示：从结论反查</a:t>
-            </a:r>
-            <a:endParaRPr/>
-          </a:p>
-        </p:txBody>
-      </p:sp>
-      <p:sp>
-        <p:nvSpPr>
-          <p:cNvPr id="5" name="Slide Number Placeholder 4">
-            <a:extLst xmlns:a="http://schemas.openxmlformats.org/drawingml/2006/main">
-              <a:ext uri="{FF2B5EF4-FFF2-40B4-BE49-F238E27FC236}">
-                <a16:creationId xmlns:a16="http://schemas.microsoft.com/office/drawing/2014/main" id="{EBA5909F-738E-F60C-BE8C-B3F1D94548E5}"/>
-              </a:ext>
-            </a:extLst>
-          </p:cNvPr>
-          <p:cNvSpPr>
-            <a:spLocks xmlns:a="http://schemas.openxmlformats.org/drawingml/2006/main" noGrp="1"/>
-          </p:cNvSpPr>
-          <p:nvPr>
-            <p:ph type="sldNum" idx="10"/>
-          </p:nvPr>
-        </p:nvSpPr>
-        <p:spPr/>
-        <p:txBody>
-          <a:bodyPr xmlns:a="http://schemas.openxmlformats.org/drawingml/2006/main"/>
-          <a:lstStyle xmlns:a="http://schemas.openxmlformats.org/drawingml/2006/main"/>
-          <a:p xmlns:a="http://schemas.openxmlformats.org/drawingml/2006/main">
-            <a:fld id="{8C630A04-5A25-9E0C-9436-126091DB86B3}" type="slidenum">
-              <a:t>6</a:t>
-            </a:fld>
-            <a:endParaRPr/>
-          </a:p>
-        </p:txBody>
-      </p:sp>
-      <p:sp>
-        <p:nvSpPr>
-          <p:cNvPr id="6" name="process-83">
-            <a:extLst xmlns:a="http://schemas.openxmlformats.org/drawingml/2006/main">
-              <a:ext uri="{FF2B5EF4-FFF2-40B4-BE49-F238E27FC236}">
-                <a16:creationId xmlns:a16="http://schemas.microsoft.com/office/drawing/2014/main" id="{5FAF802D-3B27-4B45-B9BA-EEA8488DC9D4}"/>
-              </a:ext>
-            </a:extLst>
-          </p:cNvPr>
-          <p:cNvSpPr>
-            <a:spLocks xmlns:a="http://schemas.openxmlformats.org/drawingml/2006/main" noGrp="1"/>
-          </p:cNvSpPr>
-          <p:nvPr/>
-        </p:nvSpPr>
-        <p:spPr>
-          <a:xfrm xmlns:a="http://schemas.openxmlformats.org/drawingml/2006/main">
-            <a:off x="609600" y="2000250"/>
-            <a:ext cx="1943100" cy="819150"/>
-          </a:xfrm>
-          <a:prstGeom xmlns:a="http://schemas.openxmlformats.org/drawingml/2006/main" prst="rect">
-            <a:avLst/>
-          </a:prstGeom>
-          <a:solidFill xmlns:a="http://schemas.openxmlformats.org/drawingml/2006/main">
-            <a:srgbClr val="EDF5F0"/>
-          </a:solidFill>
-          <a:ln xmlns:a="http://schemas.openxmlformats.org/drawingml/2006/main" w="0">
-            <a:noFill/>
-          </a:ln>
-        </p:spPr>
-      </p:sp>
-      <p:sp>
-        <p:nvSpPr>
-          <p:cNvPr id="7" name="content-84">
-            <a:extLst xmlns:a="http://schemas.openxmlformats.org/drawingml/2006/main">
-              <a:ext uri="{FF2B5EF4-FFF2-40B4-BE49-F238E27FC236}">
-                <a16:creationId xmlns:a16="http://schemas.microsoft.com/office/drawing/2014/main" id="{C28073C7-A63F-4B7C-8351-488A15E7E174}"/>
-              </a:ext>
-            </a:extLst>
-          </p:cNvPr>
-          <p:cNvSpPr>
-            <a:spLocks xmlns:a="http://schemas.openxmlformats.org/drawingml/2006/main" noGrp="1"/>
-          </p:cNvSpPr>
-          <p:nvPr/>
-        </p:nvSpPr>
-        <p:spPr>
-          <a:xfrm xmlns:a="http://schemas.openxmlformats.org/drawingml/2006/main">
-            <a:off x="714375" y="2085975"/>
-            <a:ext cx="1733550" cy="647700"/>
+          <p:cNvPr id="7" name="judgment-title">
+            <a:extLst xmlns:a="http://schemas.openxmlformats.org/drawingml/2006/main">
+              <a:ext uri="{FF2B5EF4-FFF2-40B4-BE49-F238E27FC236}">
+                <a16:creationId xmlns:a16="http://schemas.microsoft.com/office/drawing/2014/main" id="{99D6C1C0-04F3-458D-8F3D-8294E9BB78C1}"/>
+              </a:ext>
+            </a:extLst>
+          </p:cNvPr>
+          <p:cNvSpPr>
+            <a:spLocks xmlns:a="http://schemas.openxmlformats.org/drawingml/2006/main" noGrp="1"/>
+          </p:cNvSpPr>
+          <p:nvPr/>
+        </p:nvSpPr>
+        <p:spPr>
+          <a:xfrm xmlns:a="http://schemas.openxmlformats.org/drawingml/2006/main">
+            <a:off x="1028700" y="76200"/>
+            <a:ext cx="10687050" cy="514350"/>
           </a:xfrm>
           <a:prstGeom xmlns:a="http://schemas.openxmlformats.org/drawingml/2006/main" prst="rect">
             <a:avLst/>
@@ -8986,17 +8021,24 @@
           </a:ln>
         </p:spPr>
         <p:txBody>
-          <a:bodyPr xmlns:a="http://schemas.openxmlformats.org/drawingml/2006/main" lIns="0" tIns="0" rIns="0" bIns="0" anchor="ctr"/>
-          <a:lstStyle xmlns:a="http://schemas.openxmlformats.org/drawingml/2006/main"/>
-          <a:p xmlns:a="http://schemas.openxmlformats.org/drawingml/2006/main">
-            <a:pPr algn="ctr">
-              <a:lnSpc>
-                <a:spcPct val="118000"/>
-              </a:lnSpc>
-              <a:buNone/>
-              <a:defRPr sz="2200" b="0">
-                <a:solidFill>
-                  <a:srgbClr val="1F4D78"/>
+          <a:bodyPr xmlns:a="http://schemas.openxmlformats.org/drawingml/2006/main" lIns="0" tIns="0" rIns="0" bIns="0" anchor="t"/>
+          <a:lstStyle xmlns:a="http://schemas.openxmlformats.org/drawingml/2006/main">
+            <a:defPPr algn="l">
+              <a:defRPr sz="3000" b="1">
+                <a:solidFill>
+                  <a:srgbClr val="FFFFFF"/>
+                </a:solidFill>
+                <a:latin typeface="微软雅黑"/>
+                <a:ea typeface="微软雅黑"/>
+                <a:cs typeface="微软雅黑"/>
+              </a:defRPr>
+            </a:defPPr>
+          </a:lstStyle>
+          <a:p xmlns:a="http://schemas.openxmlformats.org/drawingml/2006/main">
+            <a:pPr algn="l">
+              <a:defRPr sz="3000" b="1">
+                <a:solidFill>
+                  <a:srgbClr val="FFFFFF"/>
                 </a:solidFill>
                 <a:latin typeface="微软雅黑"/>
                 <a:ea typeface="微软雅黑"/>
@@ -9004,37 +8046,37 @@
               </a:defRPr>
             </a:pPr>
             <a:r>
-              <a:rPr sz="2200" b="0">
-                <a:solidFill>
-                  <a:srgbClr val="1F4D78"/>
+              <a:rPr sz="3000" b="1">
+                <a:solidFill>
+                  <a:srgbClr val="FFFFFF"/>
                 </a:solidFill>
                 <a:latin typeface="微软雅黑"/>
                 <a:ea typeface="微软雅黑"/>
                 <a:cs typeface="微软雅黑"/>
               </a:rPr>
-              <a:t>结论</a:t>
-            </a:r>
-          </a:p>
-        </p:txBody>
-      </p:sp>
-      <p:sp>
-        <p:nvSpPr>
-          <p:cNvPr id="8" name="content-85">
-            <a:extLst xmlns:a="http://schemas.openxmlformats.org/drawingml/2006/main">
-              <a:ext uri="{FF2B5EF4-FFF2-40B4-BE49-F238E27FC236}">
-                <a16:creationId xmlns:a16="http://schemas.microsoft.com/office/drawing/2014/main" id="{CD4E565A-1C64-49BF-999F-A3D8004043BF}"/>
-              </a:ext>
-            </a:extLst>
-          </p:cNvPr>
-          <p:cNvSpPr>
-            <a:spLocks xmlns:a="http://schemas.openxmlformats.org/drawingml/2006/main" noGrp="1"/>
-          </p:cNvSpPr>
-          <p:nvPr/>
-        </p:nvSpPr>
-        <p:spPr>
-          <a:xfrm xmlns:a="http://schemas.openxmlformats.org/drawingml/2006/main">
-            <a:off x="2552700" y="2200275"/>
-            <a:ext cx="314325" cy="533400"/>
+              <a:t>结论—证据—运行—决定</a:t>
+            </a:r>
+          </a:p>
+        </p:txBody>
+      </p:sp>
+      <p:sp>
+        <p:nvSpPr>
+          <p:cNvPr id="2" name="judgment-body-0">
+            <a:extLst xmlns:a="http://schemas.openxmlformats.org/drawingml/2006/main">
+              <a:ext uri="{FF2B5EF4-FFF2-40B4-BE49-F238E27FC236}">
+                <a16:creationId xmlns:a16="http://schemas.microsoft.com/office/drawing/2014/main" id="{75CDC1AA-81B9-413D-ACB5-17B4EA51DCA4}"/>
+              </a:ext>
+            </a:extLst>
+          </p:cNvPr>
+          <p:cNvSpPr>
+            <a:spLocks xmlns:a="http://schemas.openxmlformats.org/drawingml/2006/main" noGrp="1"/>
+          </p:cNvSpPr>
+          <p:nvPr/>
+        </p:nvSpPr>
+        <p:spPr>
+          <a:xfrm xmlns:a="http://schemas.openxmlformats.org/drawingml/2006/main">
+            <a:off x="666750" y="1066800"/>
+            <a:ext cx="10858500" cy="1009650"/>
           </a:xfrm>
           <a:prstGeom xmlns:a="http://schemas.openxmlformats.org/drawingml/2006/main" prst="rect">
             <a:avLst/>
@@ -9046,16 +8088,23 @@
         </p:spPr>
         <p:txBody>
           <a:bodyPr xmlns:a="http://schemas.openxmlformats.org/drawingml/2006/main" lIns="0" tIns="0" rIns="0" bIns="0" anchor="t"/>
-          <a:lstStyle xmlns:a="http://schemas.openxmlformats.org/drawingml/2006/main"/>
-          <a:p xmlns:a="http://schemas.openxmlformats.org/drawingml/2006/main">
-            <a:pPr algn="ctr">
-              <a:lnSpc>
-                <a:spcPct val="118000"/>
-              </a:lnSpc>
-              <a:buNone/>
-              <a:defRPr sz="2500" b="0">
-                <a:solidFill>
-                  <a:srgbClr val="1F4D78"/>
+          <a:lstStyle xmlns:a="http://schemas.openxmlformats.org/drawingml/2006/main">
+            <a:defPPr algn="l">
+              <a:defRPr sz="2400" b="0">
+                <a:solidFill>
+                  <a:srgbClr val="263746"/>
+                </a:solidFill>
+                <a:latin typeface="微软雅黑"/>
+                <a:ea typeface="微软雅黑"/>
+                <a:cs typeface="微软雅黑"/>
+              </a:defRPr>
+            </a:defPPr>
+          </a:lstStyle>
+          <a:p xmlns:a="http://schemas.openxmlformats.org/drawingml/2006/main">
+            <a:pPr algn="l">
+              <a:defRPr sz="2400" b="0">
+                <a:solidFill>
+                  <a:srgbClr val="263746"/>
                 </a:solidFill>
                 <a:latin typeface="微软雅黑"/>
                 <a:ea typeface="微软雅黑"/>
@@ -9063,67 +8112,37 @@
               </a:defRPr>
             </a:pPr>
             <a:r>
-              <a:rPr sz="2500" b="0">
-                <a:solidFill>
-                  <a:srgbClr val="1F4D78"/>
+              <a:rPr sz="2400" b="0">
+                <a:solidFill>
+                  <a:srgbClr val="263746"/>
                 </a:solidFill>
                 <a:latin typeface="微软雅黑"/>
                 <a:ea typeface="微软雅黑"/>
                 <a:cs typeface="微软雅黑"/>
               </a:rPr>
-              <a:t>→</a:t>
-            </a:r>
-          </a:p>
-        </p:txBody>
-      </p:sp>
-      <p:sp>
-        <p:nvSpPr>
-          <p:cNvPr id="9" name="process-86">
-            <a:extLst xmlns:a="http://schemas.openxmlformats.org/drawingml/2006/main">
-              <a:ext uri="{FF2B5EF4-FFF2-40B4-BE49-F238E27FC236}">
-                <a16:creationId xmlns:a16="http://schemas.microsoft.com/office/drawing/2014/main" id="{50473089-6DAB-419B-AD0E-FB812E70279B}"/>
-              </a:ext>
-            </a:extLst>
-          </p:cNvPr>
-          <p:cNvSpPr>
-            <a:spLocks xmlns:a="http://schemas.openxmlformats.org/drawingml/2006/main" noGrp="1"/>
-          </p:cNvSpPr>
-          <p:nvPr/>
-        </p:nvSpPr>
-        <p:spPr>
-          <a:xfrm xmlns:a="http://schemas.openxmlformats.org/drawingml/2006/main">
-            <a:off x="2867025" y="2000250"/>
-            <a:ext cx="1943100" cy="819150"/>
-          </a:xfrm>
-          <a:prstGeom xmlns:a="http://schemas.openxmlformats.org/drawingml/2006/main" prst="rect">
-            <a:avLst/>
-          </a:prstGeom>
-          <a:solidFill xmlns:a="http://schemas.openxmlformats.org/drawingml/2006/main">
-            <a:srgbClr val="F4F6F8"/>
-          </a:solidFill>
-          <a:ln xmlns:a="http://schemas.openxmlformats.org/drawingml/2006/main" w="0">
-            <a:noFill/>
-          </a:ln>
-        </p:spPr>
-      </p:sp>
-      <p:sp>
-        <p:nvSpPr>
-          <p:cNvPr id="10" name="content-87">
-            <a:extLst xmlns:a="http://schemas.openxmlformats.org/drawingml/2006/main">
-              <a:ext uri="{FF2B5EF4-FFF2-40B4-BE49-F238E27FC236}">
-                <a16:creationId xmlns:a16="http://schemas.microsoft.com/office/drawing/2014/main" id="{32C310E1-8013-4F27-9EF9-BA685265F2D1}"/>
-              </a:ext>
-            </a:extLst>
-          </p:cNvPr>
-          <p:cNvSpPr>
-            <a:spLocks xmlns:a="http://schemas.openxmlformats.org/drawingml/2006/main" noGrp="1"/>
-          </p:cNvSpPr>
-          <p:nvPr/>
-        </p:nvSpPr>
-        <p:spPr>
-          <a:xfrm xmlns:a="http://schemas.openxmlformats.org/drawingml/2006/main">
-            <a:off x="2971800" y="2085975"/>
-            <a:ext cx="1733550" cy="647700"/>
+              <a:t>选一条本人关键结论，打开对应证据</a:t>
+            </a:r>
+          </a:p>
+        </p:txBody>
+      </p:sp>
+      <p:sp>
+        <p:nvSpPr>
+          <p:cNvPr id="3" name="judgment-body-1">
+            <a:extLst xmlns:a="http://schemas.openxmlformats.org/drawingml/2006/main">
+              <a:ext uri="{FF2B5EF4-FFF2-40B4-BE49-F238E27FC236}">
+                <a16:creationId xmlns:a16="http://schemas.microsoft.com/office/drawing/2014/main" id="{A9BFFDAA-CA24-40A7-8BA6-89769441B708}"/>
+              </a:ext>
+            </a:extLst>
+          </p:cNvPr>
+          <p:cNvSpPr>
+            <a:spLocks xmlns:a="http://schemas.openxmlformats.org/drawingml/2006/main" noGrp="1"/>
+          </p:cNvSpPr>
+          <p:nvPr/>
+        </p:nvSpPr>
+        <p:spPr>
+          <a:xfrm xmlns:a="http://schemas.openxmlformats.org/drawingml/2006/main">
+            <a:off x="666750" y="2238375"/>
+            <a:ext cx="10858500" cy="2076450"/>
           </a:xfrm>
           <a:prstGeom xmlns:a="http://schemas.openxmlformats.org/drawingml/2006/main" prst="rect">
             <a:avLst/>
@@ -9134,17 +8153,24 @@
           </a:ln>
         </p:spPr>
         <p:txBody>
-          <a:bodyPr xmlns:a="http://schemas.openxmlformats.org/drawingml/2006/main" lIns="0" tIns="0" rIns="0" bIns="0" anchor="ctr"/>
-          <a:lstStyle xmlns:a="http://schemas.openxmlformats.org/drawingml/2006/main"/>
-          <a:p xmlns:a="http://schemas.openxmlformats.org/drawingml/2006/main">
-            <a:pPr algn="ctr">
-              <a:lnSpc>
-                <a:spcPct val="118000"/>
-              </a:lnSpc>
-              <a:buNone/>
-              <a:defRPr sz="2200" b="0">
-                <a:solidFill>
-                  <a:srgbClr val="1F4D78"/>
+          <a:bodyPr xmlns:a="http://schemas.openxmlformats.org/drawingml/2006/main" lIns="0" tIns="0" rIns="0" bIns="0" anchor="t"/>
+          <a:lstStyle xmlns:a="http://schemas.openxmlformats.org/drawingml/2006/main">
+            <a:defPPr algn="l">
+              <a:defRPr sz="2400" b="0">
+                <a:solidFill>
+                  <a:srgbClr val="263746"/>
+                </a:solidFill>
+                <a:latin typeface="微软雅黑"/>
+                <a:ea typeface="微软雅黑"/>
+                <a:cs typeface="微软雅黑"/>
+              </a:defRPr>
+            </a:defPPr>
+          </a:lstStyle>
+          <a:p xmlns:a="http://schemas.openxmlformats.org/drawingml/2006/main">
+            <a:pPr algn="l">
+              <a:defRPr sz="2400" b="0">
+                <a:solidFill>
+                  <a:srgbClr val="263746"/>
                 </a:solidFill>
                 <a:latin typeface="微软雅黑"/>
                 <a:ea typeface="微软雅黑"/>
@@ -9152,37 +8178,60 @@
               </a:defRPr>
             </a:pPr>
             <a:r>
-              <a:rPr sz="2200" b="0">
-                <a:solidFill>
-                  <a:srgbClr val="1F4D78"/>
+              <a:rPr sz="2400" b="0">
+                <a:solidFill>
+                  <a:srgbClr val="263746"/>
                 </a:solidFill>
                 <a:latin typeface="微软雅黑"/>
                 <a:ea typeface="微软雅黑"/>
                 <a:cs typeface="微软雅黑"/>
               </a:rPr>
-              <a:t>证据项／实验 ID</a:t>
-            </a:r>
-          </a:p>
-        </p:txBody>
-      </p:sp>
-      <p:sp>
-        <p:nvSpPr>
-          <p:cNvPr id="11" name="content-88">
-            <a:extLst xmlns:a="http://schemas.openxmlformats.org/drawingml/2006/main">
-              <a:ext uri="{FF2B5EF4-FFF2-40B4-BE49-F238E27FC236}">
-                <a16:creationId xmlns:a16="http://schemas.microsoft.com/office/drawing/2014/main" id="{05E4138E-3C4C-4486-93CF-7E8AA376FE7C}"/>
-              </a:ext>
-            </a:extLst>
-          </p:cNvPr>
-          <p:cNvSpPr>
-            <a:spLocks xmlns:a="http://schemas.openxmlformats.org/drawingml/2006/main" noGrp="1"/>
-          </p:cNvSpPr>
-          <p:nvPr/>
-        </p:nvSpPr>
-        <p:spPr>
-          <a:xfrm xmlns:a="http://schemas.openxmlformats.org/drawingml/2006/main">
-            <a:off x="4810125" y="2200275"/>
-            <a:ext cx="314325" cy="533400"/>
+              <a:t>同伴反查：运行 ID、输入版本、评价定义</a:t>
+            </a:r>
+          </a:p>
+          <a:p xmlns:a="http://schemas.openxmlformats.org/drawingml/2006/main">
+            <a:pPr algn="l">
+              <a:defRPr sz="2400" b="0">
+                <a:solidFill>
+                  <a:srgbClr val="263746"/>
+                </a:solidFill>
+                <a:latin typeface="微软雅黑"/>
+                <a:ea typeface="微软雅黑"/>
+                <a:cs typeface="微软雅黑"/>
+              </a:defRPr>
+            </a:pPr>
+            <a:r>
+              <a:rPr sz="2400" b="0">
+                <a:solidFill>
+                  <a:srgbClr val="263746"/>
+                </a:solidFill>
+                <a:latin typeface="微软雅黑"/>
+                <a:ea typeface="微软雅黑"/>
+                <a:cs typeface="微软雅黑"/>
+              </a:rPr>
+              <a:t>作者说明：baseline 取舍、停止条件和范围</a:t>
+            </a:r>
+          </a:p>
+        </p:txBody>
+      </p:sp>
+      <p:sp>
+        <p:nvSpPr>
+          <p:cNvPr id="4" name="judgment-body-2">
+            <a:extLst xmlns:a="http://schemas.openxmlformats.org/drawingml/2006/main">
+              <a:ext uri="{FF2B5EF4-FFF2-40B4-BE49-F238E27FC236}">
+                <a16:creationId xmlns:a16="http://schemas.microsoft.com/office/drawing/2014/main" id="{60618F85-F15E-4C8D-A4A2-49A795798045}"/>
+              </a:ext>
+            </a:extLst>
+          </p:cNvPr>
+          <p:cNvSpPr>
+            <a:spLocks xmlns:a="http://schemas.openxmlformats.org/drawingml/2006/main" noGrp="1"/>
+          </p:cNvSpPr>
+          <p:nvPr/>
+        </p:nvSpPr>
+        <p:spPr>
+          <a:xfrm xmlns:a="http://schemas.openxmlformats.org/drawingml/2006/main">
+            <a:off x="666750" y="4495800"/>
+            <a:ext cx="10858500" cy="1409700"/>
           </a:xfrm>
           <a:prstGeom xmlns:a="http://schemas.openxmlformats.org/drawingml/2006/main" prst="rect">
             <a:avLst/>
@@ -9194,14 +8243,9 @@
         </p:spPr>
         <p:txBody>
           <a:bodyPr xmlns:a="http://schemas.openxmlformats.org/drawingml/2006/main" lIns="0" tIns="0" rIns="0" bIns="0" anchor="t"/>
-          <a:lstStyle xmlns:a="http://schemas.openxmlformats.org/drawingml/2006/main"/>
-          <a:p xmlns:a="http://schemas.openxmlformats.org/drawingml/2006/main">
-            <a:pPr algn="ctr">
-              <a:lnSpc>
-                <a:spcPct val="118000"/>
-              </a:lnSpc>
-              <a:buNone/>
-              <a:defRPr sz="2500" b="0">
+          <a:lstStyle xmlns:a="http://schemas.openxmlformats.org/drawingml/2006/main">
+            <a:defPPr algn="l">
+              <a:defRPr sz="2200" b="0">
                 <a:solidFill>
                   <a:srgbClr val="1F4D78"/>
                 </a:solidFill>
@@ -9209,9 +8253,21 @@
                 <a:ea typeface="微软雅黑"/>
                 <a:cs typeface="微软雅黑"/>
               </a:defRPr>
+            </a:defPPr>
+          </a:lstStyle>
+          <a:p xmlns:a="http://schemas.openxmlformats.org/drawingml/2006/main">
+            <a:pPr algn="l">
+              <a:defRPr sz="2200" b="0">
+                <a:solidFill>
+                  <a:srgbClr val="1F4D78"/>
+                </a:solidFill>
+                <a:latin typeface="微软雅黑"/>
+                <a:ea typeface="微软雅黑"/>
+                <a:cs typeface="微软雅黑"/>
+              </a:defRPr>
             </a:pPr>
             <a:r>
-              <a:rPr sz="2500" b="0">
+              <a:rPr sz="2200" b="0">
                 <a:solidFill>
                   <a:srgbClr val="1F4D78"/>
                 </a:solidFill>
@@ -9219,59 +8275,29 @@
                 <a:ea typeface="微软雅黑"/>
                 <a:cs typeface="微软雅黑"/>
               </a:rPr>
-              <a:t>→</a:t>
-            </a:r>
-          </a:p>
-        </p:txBody>
-      </p:sp>
-      <p:sp>
-        <p:nvSpPr>
-          <p:cNvPr id="12" name="process-89">
-            <a:extLst xmlns:a="http://schemas.openxmlformats.org/drawingml/2006/main">
-              <a:ext uri="{FF2B5EF4-FFF2-40B4-BE49-F238E27FC236}">
-                <a16:creationId xmlns:a16="http://schemas.microsoft.com/office/drawing/2014/main" id="{54081697-866E-4E07-B70F-F83E22E197B2}"/>
-              </a:ext>
-            </a:extLst>
-          </p:cNvPr>
-          <p:cNvSpPr>
-            <a:spLocks xmlns:a="http://schemas.openxmlformats.org/drawingml/2006/main" noGrp="1"/>
-          </p:cNvSpPr>
-          <p:nvPr/>
-        </p:nvSpPr>
-        <p:spPr>
-          <a:xfrm xmlns:a="http://schemas.openxmlformats.org/drawingml/2006/main">
-            <a:off x="5124450" y="2000250"/>
-            <a:ext cx="1943100" cy="819150"/>
-          </a:xfrm>
-          <a:prstGeom xmlns:a="http://schemas.openxmlformats.org/drawingml/2006/main" prst="rect">
-            <a:avLst/>
-          </a:prstGeom>
-          <a:solidFill xmlns:a="http://schemas.openxmlformats.org/drawingml/2006/main">
-            <a:srgbClr val="F4F6F8"/>
-          </a:solidFill>
-          <a:ln xmlns:a="http://schemas.openxmlformats.org/drawingml/2006/main" w="0">
-            <a:noFill/>
-          </a:ln>
-        </p:spPr>
-      </p:sp>
-      <p:sp>
-        <p:nvSpPr>
-          <p:cNvPr id="13" name="content-90">
-            <a:extLst xmlns:a="http://schemas.openxmlformats.org/drawingml/2006/main">
-              <a:ext uri="{FF2B5EF4-FFF2-40B4-BE49-F238E27FC236}">
-                <a16:creationId xmlns:a16="http://schemas.microsoft.com/office/drawing/2014/main" id="{98B3E5AB-8D22-4C08-A225-C402A6204E29}"/>
-              </a:ext>
-            </a:extLst>
-          </p:cNvPr>
-          <p:cNvSpPr>
-            <a:spLocks xmlns:a="http://schemas.openxmlformats.org/drawingml/2006/main" noGrp="1"/>
-          </p:cNvSpPr>
-          <p:nvPr/>
-        </p:nvSpPr>
-        <p:spPr>
-          <a:xfrm xmlns:a="http://schemas.openxmlformats.org/drawingml/2006/main">
-            <a:off x="5229225" y="2085975"/>
-            <a:ext cx="1733550" cy="647700"/>
+              <a:t>展示一次失败、放弃的备选或未决问题；记录缺口及处理决定。</a:t>
+            </a:r>
+          </a:p>
+        </p:txBody>
+      </p:sp>
+      <p:sp>
+        <p:nvSpPr>
+          <p:cNvPr id="5" name="judgment-source">
+            <a:extLst xmlns:a="http://schemas.openxmlformats.org/drawingml/2006/main">
+              <a:ext uri="{FF2B5EF4-FFF2-40B4-BE49-F238E27FC236}">
+                <a16:creationId xmlns:a16="http://schemas.microsoft.com/office/drawing/2014/main" id="{B9CE62A3-3443-4441-A518-D2DBB5C039C5}"/>
+              </a:ext>
+            </a:extLst>
+          </p:cNvPr>
+          <p:cNvSpPr>
+            <a:spLocks xmlns:a="http://schemas.openxmlformats.org/drawingml/2006/main" noGrp="1"/>
+          </p:cNvSpPr>
+          <p:nvPr/>
+        </p:nvSpPr>
+        <p:spPr>
+          <a:xfrm xmlns:a="http://schemas.openxmlformats.org/drawingml/2006/main">
+            <a:off x="666750" y="6276975"/>
+            <a:ext cx="10572750" cy="209550"/>
           </a:xfrm>
           <a:prstGeom xmlns:a="http://schemas.openxmlformats.org/drawingml/2006/main" prst="rect">
             <a:avLst/>
@@ -9282,17 +8308,24 @@
           </a:ln>
         </p:spPr>
         <p:txBody>
-          <a:bodyPr xmlns:a="http://schemas.openxmlformats.org/drawingml/2006/main" lIns="0" tIns="0" rIns="0" bIns="0" anchor="ctr"/>
-          <a:lstStyle xmlns:a="http://schemas.openxmlformats.org/drawingml/2006/main"/>
-          <a:p xmlns:a="http://schemas.openxmlformats.org/drawingml/2006/main">
-            <a:pPr algn="ctr">
-              <a:lnSpc>
-                <a:spcPct val="118000"/>
-              </a:lnSpc>
-              <a:buNone/>
-              <a:defRPr sz="2200" b="0">
-                <a:solidFill>
-                  <a:srgbClr val="1F4D78"/>
+          <a:bodyPr xmlns:a="http://schemas.openxmlformats.org/drawingml/2006/main" lIns="0" tIns="0" rIns="0" bIns="0" anchor="t"/>
+          <a:lstStyle xmlns:a="http://schemas.openxmlformats.org/drawingml/2006/main">
+            <a:defPPr algn="l">
+              <a:defRPr sz="1100" b="0">
+                <a:solidFill>
+                  <a:srgbClr val="667684"/>
+                </a:solidFill>
+                <a:latin typeface="微软雅黑"/>
+                <a:ea typeface="微软雅黑"/>
+                <a:cs typeface="微软雅黑"/>
+              </a:defRPr>
+            </a:defPPr>
+          </a:lstStyle>
+          <a:p xmlns:a="http://schemas.openxmlformats.org/drawingml/2006/main">
+            <a:pPr algn="l">
+              <a:defRPr sz="1100" b="0">
+                <a:solidFill>
+                  <a:srgbClr val="667684"/>
                 </a:solidFill>
                 <a:latin typeface="微软雅黑"/>
                 <a:ea typeface="微软雅黑"/>
@@ -9300,37 +8333,37 @@
               </a:defRPr>
             </a:pPr>
             <a:r>
-              <a:rPr sz="2200" b="0">
-                <a:solidFill>
-                  <a:srgbClr val="1F4D78"/>
+              <a:rPr sz="1100" b="0">
+                <a:solidFill>
+                  <a:srgbClr val="667684"/>
                 </a:solidFill>
                 <a:latin typeface="微软雅黑"/>
                 <a:ea typeface="微软雅黑"/>
                 <a:cs typeface="微软雅黑"/>
               </a:rPr>
-              <a:t>运行记录</a:t>
-            </a:r>
-          </a:p>
-        </p:txBody>
-      </p:sp>
-      <p:sp>
-        <p:nvSpPr>
-          <p:cNvPr id="14" name="content-91">
-            <a:extLst xmlns:a="http://schemas.openxmlformats.org/drawingml/2006/main">
-              <a:ext uri="{FF2B5EF4-FFF2-40B4-BE49-F238E27FC236}">
-                <a16:creationId xmlns:a16="http://schemas.microsoft.com/office/drawing/2014/main" id="{A5FE375B-14C5-47F4-99F9-97A628A9E36C}"/>
-              </a:ext>
-            </a:extLst>
-          </p:cNvPr>
-          <p:cNvSpPr>
-            <a:spLocks xmlns:a="http://schemas.openxmlformats.org/drawingml/2006/main" noGrp="1"/>
-          </p:cNvSpPr>
-          <p:nvPr/>
-        </p:nvSpPr>
-        <p:spPr>
-          <a:xfrm xmlns:a="http://schemas.openxmlformats.org/drawingml/2006/main">
-            <a:off x="7067550" y="2200275"/>
-            <a:ext cx="314325" cy="533400"/>
+              <a:t>来源：本课判断任务与讲义；构造材料及真实来源按材料包标识</a:t>
+            </a:r>
+          </a:p>
+        </p:txBody>
+      </p:sp>
+      <p:sp>
+        <p:nvSpPr>
+          <p:cNvPr id="6" name="judgment-page">
+            <a:extLst xmlns:a="http://schemas.openxmlformats.org/drawingml/2006/main">
+              <a:ext uri="{FF2B5EF4-FFF2-40B4-BE49-F238E27FC236}">
+                <a16:creationId xmlns:a16="http://schemas.microsoft.com/office/drawing/2014/main" id="{7413956B-479E-40CA-A503-A2EF1FE18D43}"/>
+              </a:ext>
+            </a:extLst>
+          </p:cNvPr>
+          <p:cNvSpPr>
+            <a:spLocks xmlns:a="http://schemas.openxmlformats.org/drawingml/2006/main" noGrp="1"/>
+          </p:cNvSpPr>
+          <p:nvPr/>
+        </p:nvSpPr>
+        <p:spPr>
+          <a:xfrm xmlns:a="http://schemas.openxmlformats.org/drawingml/2006/main">
+            <a:off x="11715750" y="6562725"/>
+            <a:ext cx="238125" cy="171450"/>
           </a:xfrm>
           <a:prstGeom xmlns:a="http://schemas.openxmlformats.org/drawingml/2006/main" prst="rect">
             <a:avLst/>
@@ -9342,16 +8375,23 @@
         </p:spPr>
         <p:txBody>
           <a:bodyPr xmlns:a="http://schemas.openxmlformats.org/drawingml/2006/main" lIns="0" tIns="0" rIns="0" bIns="0" anchor="t"/>
-          <a:lstStyle xmlns:a="http://schemas.openxmlformats.org/drawingml/2006/main"/>
-          <a:p xmlns:a="http://schemas.openxmlformats.org/drawingml/2006/main">
-            <a:pPr algn="ctr">
-              <a:lnSpc>
-                <a:spcPct val="118000"/>
-              </a:lnSpc>
-              <a:buNone/>
-              <a:defRPr sz="2500" b="0">
-                <a:solidFill>
-                  <a:srgbClr val="1F4D78"/>
+          <a:lstStyle xmlns:a="http://schemas.openxmlformats.org/drawingml/2006/main">
+            <a:defPPr algn="l">
+              <a:defRPr sz="900" b="0">
+                <a:solidFill>
+                  <a:srgbClr val="A5A5A5"/>
+                </a:solidFill>
+                <a:latin typeface="微软雅黑"/>
+                <a:ea typeface="微软雅黑"/>
+                <a:cs typeface="微软雅黑"/>
+              </a:defRPr>
+            </a:defPPr>
+          </a:lstStyle>
+          <a:p xmlns:a="http://schemas.openxmlformats.org/drawingml/2006/main">
+            <a:pPr algn="l">
+              <a:defRPr sz="900" b="0">
+                <a:solidFill>
+                  <a:srgbClr val="A5A5A5"/>
                 </a:solidFill>
                 <a:latin typeface="微软雅黑"/>
                 <a:ea typeface="微软雅黑"/>
@@ -9359,370 +8399,15 @@
               </a:defRPr>
             </a:pPr>
             <a:r>
-              <a:rPr sz="2500" b="0">
-                <a:solidFill>
-                  <a:srgbClr val="1F4D78"/>
+              <a:rPr sz="900" b="0">
+                <a:solidFill>
+                  <a:srgbClr val="A5A5A5"/>
                 </a:solidFill>
                 <a:latin typeface="微软雅黑"/>
                 <a:ea typeface="微软雅黑"/>
                 <a:cs typeface="微软雅黑"/>
               </a:rPr>
-              <a:t>→</a:t>
-            </a:r>
-          </a:p>
-        </p:txBody>
-      </p:sp>
-      <p:sp>
-        <p:nvSpPr>
-          <p:cNvPr id="15" name="process-92">
-            <a:extLst xmlns:a="http://schemas.openxmlformats.org/drawingml/2006/main">
-              <a:ext uri="{FF2B5EF4-FFF2-40B4-BE49-F238E27FC236}">
-                <a16:creationId xmlns:a16="http://schemas.microsoft.com/office/drawing/2014/main" id="{83736711-185A-4821-BDB7-8C9A4BECAC7F}"/>
-              </a:ext>
-            </a:extLst>
-          </p:cNvPr>
-          <p:cNvSpPr>
-            <a:spLocks xmlns:a="http://schemas.openxmlformats.org/drawingml/2006/main" noGrp="1"/>
-          </p:cNvSpPr>
-          <p:nvPr/>
-        </p:nvSpPr>
-        <p:spPr>
-          <a:xfrm xmlns:a="http://schemas.openxmlformats.org/drawingml/2006/main">
-            <a:off x="7381875" y="2000250"/>
-            <a:ext cx="1943100" cy="819150"/>
-          </a:xfrm>
-          <a:prstGeom xmlns:a="http://schemas.openxmlformats.org/drawingml/2006/main" prst="rect">
-            <a:avLst/>
-          </a:prstGeom>
-          <a:solidFill xmlns:a="http://schemas.openxmlformats.org/drawingml/2006/main">
-            <a:srgbClr val="F4F6F8"/>
-          </a:solidFill>
-          <a:ln xmlns:a="http://schemas.openxmlformats.org/drawingml/2006/main" w="0">
-            <a:noFill/>
-          </a:ln>
-        </p:spPr>
-      </p:sp>
-      <p:sp>
-        <p:nvSpPr>
-          <p:cNvPr id="16" name="content-93">
-            <a:extLst xmlns:a="http://schemas.openxmlformats.org/drawingml/2006/main">
-              <a:ext uri="{FF2B5EF4-FFF2-40B4-BE49-F238E27FC236}">
-                <a16:creationId xmlns:a16="http://schemas.microsoft.com/office/drawing/2014/main" id="{3C7054BF-EF7F-45A6-A898-2998AED284E8}"/>
-              </a:ext>
-            </a:extLst>
-          </p:cNvPr>
-          <p:cNvSpPr>
-            <a:spLocks xmlns:a="http://schemas.openxmlformats.org/drawingml/2006/main" noGrp="1"/>
-          </p:cNvSpPr>
-          <p:nvPr/>
-        </p:nvSpPr>
-        <p:spPr>
-          <a:xfrm xmlns:a="http://schemas.openxmlformats.org/drawingml/2006/main">
-            <a:off x="7486650" y="2085975"/>
-            <a:ext cx="1733550" cy="647700"/>
-          </a:xfrm>
-          <a:prstGeom xmlns:a="http://schemas.openxmlformats.org/drawingml/2006/main" prst="rect">
-            <a:avLst/>
-          </a:prstGeom>
-          <a:noFill xmlns:a="http://schemas.openxmlformats.org/drawingml/2006/main"/>
-          <a:ln xmlns:a="http://schemas.openxmlformats.org/drawingml/2006/main" w="0">
-            <a:noFill/>
-          </a:ln>
-        </p:spPr>
-        <p:txBody>
-          <a:bodyPr xmlns:a="http://schemas.openxmlformats.org/drawingml/2006/main" lIns="0" tIns="0" rIns="0" bIns="0" anchor="ctr"/>
-          <a:lstStyle xmlns:a="http://schemas.openxmlformats.org/drawingml/2006/main"/>
-          <a:p xmlns:a="http://schemas.openxmlformats.org/drawingml/2006/main">
-            <a:pPr algn="ctr">
-              <a:lnSpc>
-                <a:spcPct val="118000"/>
-              </a:lnSpc>
-              <a:buNone/>
-              <a:defRPr sz="2200" b="0">
-                <a:solidFill>
-                  <a:srgbClr val="1F4D78"/>
-                </a:solidFill>
-                <a:latin typeface="微软雅黑"/>
-                <a:ea typeface="微软雅黑"/>
-                <a:cs typeface="微软雅黑"/>
-              </a:defRPr>
-            </a:pPr>
-            <a:r>
-              <a:rPr sz="2200" b="0">
-                <a:solidFill>
-                  <a:srgbClr val="1F4D78"/>
-                </a:solidFill>
-                <a:latin typeface="微软雅黑"/>
-                <a:ea typeface="微软雅黑"/>
-                <a:cs typeface="微软雅黑"/>
-              </a:rPr>
-              <a:t>上游判断</a:t>
-            </a:r>
-          </a:p>
-        </p:txBody>
-      </p:sp>
-      <p:sp>
-        <p:nvSpPr>
-          <p:cNvPr id="17" name="content-94">
-            <a:extLst xmlns:a="http://schemas.openxmlformats.org/drawingml/2006/main">
-              <a:ext uri="{FF2B5EF4-FFF2-40B4-BE49-F238E27FC236}">
-                <a16:creationId xmlns:a16="http://schemas.microsoft.com/office/drawing/2014/main" id="{99FC081D-BAF6-49B7-BD70-F24876909C70}"/>
-              </a:ext>
-            </a:extLst>
-          </p:cNvPr>
-          <p:cNvSpPr>
-            <a:spLocks xmlns:a="http://schemas.openxmlformats.org/drawingml/2006/main" noGrp="1"/>
-          </p:cNvSpPr>
-          <p:nvPr/>
-        </p:nvSpPr>
-        <p:spPr>
-          <a:xfrm xmlns:a="http://schemas.openxmlformats.org/drawingml/2006/main">
-            <a:off x="9324975" y="2200275"/>
-            <a:ext cx="314325" cy="533400"/>
-          </a:xfrm>
-          <a:prstGeom xmlns:a="http://schemas.openxmlformats.org/drawingml/2006/main" prst="rect">
-            <a:avLst/>
-          </a:prstGeom>
-          <a:noFill xmlns:a="http://schemas.openxmlformats.org/drawingml/2006/main"/>
-          <a:ln xmlns:a="http://schemas.openxmlformats.org/drawingml/2006/main" w="0">
-            <a:noFill/>
-          </a:ln>
-        </p:spPr>
-        <p:txBody>
-          <a:bodyPr xmlns:a="http://schemas.openxmlformats.org/drawingml/2006/main" lIns="0" tIns="0" rIns="0" bIns="0" anchor="t"/>
-          <a:lstStyle xmlns:a="http://schemas.openxmlformats.org/drawingml/2006/main"/>
-          <a:p xmlns:a="http://schemas.openxmlformats.org/drawingml/2006/main">
-            <a:pPr algn="ctr">
-              <a:lnSpc>
-                <a:spcPct val="118000"/>
-              </a:lnSpc>
-              <a:buNone/>
-              <a:defRPr sz="2500" b="0">
-                <a:solidFill>
-                  <a:srgbClr val="1F4D78"/>
-                </a:solidFill>
-                <a:latin typeface="微软雅黑"/>
-                <a:ea typeface="微软雅黑"/>
-                <a:cs typeface="微软雅黑"/>
-              </a:defRPr>
-            </a:pPr>
-            <a:r>
-              <a:rPr sz="2500" b="0">
-                <a:solidFill>
-                  <a:srgbClr val="1F4D78"/>
-                </a:solidFill>
-                <a:latin typeface="微软雅黑"/>
-                <a:ea typeface="微软雅黑"/>
-                <a:cs typeface="微软雅黑"/>
-              </a:rPr>
-              <a:t>→</a:t>
-            </a:r>
-          </a:p>
-        </p:txBody>
-      </p:sp>
-      <p:sp>
-        <p:nvSpPr>
-          <p:cNvPr id="18" name="process-95">
-            <a:extLst xmlns:a="http://schemas.openxmlformats.org/drawingml/2006/main">
-              <a:ext uri="{FF2B5EF4-FFF2-40B4-BE49-F238E27FC236}">
-                <a16:creationId xmlns:a16="http://schemas.microsoft.com/office/drawing/2014/main" id="{388E661A-6988-4F94-BF77-F4DFAB94C019}"/>
-              </a:ext>
-            </a:extLst>
-          </p:cNvPr>
-          <p:cNvSpPr>
-            <a:spLocks xmlns:a="http://schemas.openxmlformats.org/drawingml/2006/main" noGrp="1"/>
-          </p:cNvSpPr>
-          <p:nvPr/>
-        </p:nvSpPr>
-        <p:spPr>
-          <a:xfrm xmlns:a="http://schemas.openxmlformats.org/drawingml/2006/main">
-            <a:off x="9639300" y="2000250"/>
-            <a:ext cx="1943100" cy="819150"/>
-          </a:xfrm>
-          <a:prstGeom xmlns:a="http://schemas.openxmlformats.org/drawingml/2006/main" prst="rect">
-            <a:avLst/>
-          </a:prstGeom>
-          <a:solidFill xmlns:a="http://schemas.openxmlformats.org/drawingml/2006/main">
-            <a:srgbClr val="F4F6F8"/>
-          </a:solidFill>
-          <a:ln xmlns:a="http://schemas.openxmlformats.org/drawingml/2006/main" w="0">
-            <a:noFill/>
-          </a:ln>
-        </p:spPr>
-      </p:sp>
-      <p:sp>
-        <p:nvSpPr>
-          <p:cNvPr id="19" name="content-96">
-            <a:extLst xmlns:a="http://schemas.openxmlformats.org/drawingml/2006/main">
-              <a:ext uri="{FF2B5EF4-FFF2-40B4-BE49-F238E27FC236}">
-                <a16:creationId xmlns:a16="http://schemas.microsoft.com/office/drawing/2014/main" id="{C77CA478-F696-4B9E-B2C5-64D4643E9502}"/>
-              </a:ext>
-            </a:extLst>
-          </p:cNvPr>
-          <p:cNvSpPr>
-            <a:spLocks xmlns:a="http://schemas.openxmlformats.org/drawingml/2006/main" noGrp="1"/>
-          </p:cNvSpPr>
-          <p:nvPr/>
-        </p:nvSpPr>
-        <p:spPr>
-          <a:xfrm xmlns:a="http://schemas.openxmlformats.org/drawingml/2006/main">
-            <a:off x="9744075" y="2085975"/>
-            <a:ext cx="1733550" cy="647700"/>
-          </a:xfrm>
-          <a:prstGeom xmlns:a="http://schemas.openxmlformats.org/drawingml/2006/main" prst="rect">
-            <a:avLst/>
-          </a:prstGeom>
-          <a:noFill xmlns:a="http://schemas.openxmlformats.org/drawingml/2006/main"/>
-          <a:ln xmlns:a="http://schemas.openxmlformats.org/drawingml/2006/main" w="0">
-            <a:noFill/>
-          </a:ln>
-        </p:spPr>
-        <p:txBody>
-          <a:bodyPr xmlns:a="http://schemas.openxmlformats.org/drawingml/2006/main" lIns="0" tIns="0" rIns="0" bIns="0" anchor="ctr"/>
-          <a:lstStyle xmlns:a="http://schemas.openxmlformats.org/drawingml/2006/main"/>
-          <a:p xmlns:a="http://schemas.openxmlformats.org/drawingml/2006/main">
-            <a:pPr algn="ctr">
-              <a:lnSpc>
-                <a:spcPct val="118000"/>
-              </a:lnSpc>
-              <a:buNone/>
-              <a:defRPr sz="2200" b="0">
-                <a:solidFill>
-                  <a:srgbClr val="1F4D78"/>
-                </a:solidFill>
-                <a:latin typeface="微软雅黑"/>
-                <a:ea typeface="微软雅黑"/>
-                <a:cs typeface="微软雅黑"/>
-              </a:defRPr>
-            </a:pPr>
-            <a:r>
-              <a:rPr sz="2200" b="0">
-                <a:solidFill>
-                  <a:srgbClr val="1F4D78"/>
-                </a:solidFill>
-                <a:latin typeface="微软雅黑"/>
-                <a:ea typeface="微软雅黑"/>
-                <a:cs typeface="微软雅黑"/>
-              </a:rPr>
-              <a:t>边界</a:t>
-            </a:r>
-          </a:p>
-        </p:txBody>
-      </p:sp>
-      <p:sp>
-        <p:nvSpPr>
-          <p:cNvPr id="20" name="content-97">
-            <a:extLst xmlns:a="http://schemas.openxmlformats.org/drawingml/2006/main">
-              <a:ext uri="{FF2B5EF4-FFF2-40B4-BE49-F238E27FC236}">
-                <a16:creationId xmlns:a16="http://schemas.microsoft.com/office/drawing/2014/main" id="{20EF7E39-323E-42C5-8F22-66DFBF7F5695}"/>
-              </a:ext>
-            </a:extLst>
-          </p:cNvPr>
-          <p:cNvSpPr>
-            <a:spLocks xmlns:a="http://schemas.openxmlformats.org/drawingml/2006/main" noGrp="1"/>
-          </p:cNvSpPr>
-          <p:nvPr/>
-        </p:nvSpPr>
-        <p:spPr>
-          <a:xfrm xmlns:a="http://schemas.openxmlformats.org/drawingml/2006/main">
-            <a:off x="609600" y="3286125"/>
-            <a:ext cx="10972800" cy="417195"/>
-          </a:xfrm>
-          <a:prstGeom xmlns:a="http://schemas.openxmlformats.org/drawingml/2006/main" prst="rect">
-            <a:avLst/>
-          </a:prstGeom>
-          <a:noFill xmlns:a="http://schemas.openxmlformats.org/drawingml/2006/main"/>
-          <a:ln xmlns:a="http://schemas.openxmlformats.org/drawingml/2006/main" w="0">
-            <a:noFill/>
-          </a:ln>
-        </p:spPr>
-        <p:txBody>
-          <a:bodyPr xmlns:a="http://schemas.openxmlformats.org/drawingml/2006/main" lIns="0" tIns="0" rIns="0" bIns="0" anchor="t"/>
-          <a:lstStyle xmlns:a="http://schemas.openxmlformats.org/drawingml/2006/main"/>
-          <a:p xmlns:a="http://schemas.openxmlformats.org/drawingml/2006/main">
-            <a:pPr algn="l">
-              <a:lnSpc>
-                <a:spcPct val="118000"/>
-              </a:lnSpc>
-              <a:buNone/>
-              <a:defRPr sz="2300" b="0">
-                <a:solidFill>
-                  <a:srgbClr val="27333D"/>
-                </a:solidFill>
-                <a:latin typeface="微软雅黑"/>
-                <a:ea typeface="微软雅黑"/>
-                <a:cs typeface="微软雅黑"/>
-              </a:defRPr>
-            </a:pPr>
-            <a:r>
-              <a:rPr sz="2300" b="0">
-                <a:solidFill>
-                  <a:srgbClr val="27333D"/>
-                </a:solidFill>
-                <a:latin typeface="微软雅黑"/>
-                <a:ea typeface="微软雅黑"/>
-                <a:cs typeface="微软雅黑"/>
-              </a:rPr>
-              <a:t>研究判断：支持／反驳／仍不能判断</a:t>
-            </a:r>
-          </a:p>
-        </p:txBody>
-      </p:sp>
-      <p:sp>
-        <p:nvSpPr>
-          <p:cNvPr id="21" name="content-98">
-            <a:extLst xmlns:a="http://schemas.openxmlformats.org/drawingml/2006/main">
-              <a:ext uri="{FF2B5EF4-FFF2-40B4-BE49-F238E27FC236}">
-                <a16:creationId xmlns:a16="http://schemas.microsoft.com/office/drawing/2014/main" id="{59AFBEBD-F07B-43B5-847B-12A6FDC6CD7B}"/>
-              </a:ext>
-            </a:extLst>
-          </p:cNvPr>
-          <p:cNvSpPr>
-            <a:spLocks xmlns:a="http://schemas.openxmlformats.org/drawingml/2006/main" noGrp="1"/>
-          </p:cNvSpPr>
-          <p:nvPr/>
-        </p:nvSpPr>
-        <p:spPr>
-          <a:xfrm xmlns:a="http://schemas.openxmlformats.org/drawingml/2006/main">
-            <a:off x="609600" y="3865245"/>
-            <a:ext cx="10972800" cy="417195"/>
-          </a:xfrm>
-          <a:prstGeom xmlns:a="http://schemas.openxmlformats.org/drawingml/2006/main" prst="rect">
-            <a:avLst/>
-          </a:prstGeom>
-          <a:noFill xmlns:a="http://schemas.openxmlformats.org/drawingml/2006/main"/>
-          <a:ln xmlns:a="http://schemas.openxmlformats.org/drawingml/2006/main" w="0">
-            <a:noFill/>
-          </a:ln>
-        </p:spPr>
-        <p:txBody>
-          <a:bodyPr xmlns:a="http://schemas.openxmlformats.org/drawingml/2006/main" lIns="0" tIns="0" rIns="0" bIns="0" anchor="t"/>
-          <a:lstStyle xmlns:a="http://schemas.openxmlformats.org/drawingml/2006/main"/>
-          <a:p xmlns:a="http://schemas.openxmlformats.org/drawingml/2006/main">
-            <a:pPr algn="l">
-              <a:lnSpc>
-                <a:spcPct val="118000"/>
-              </a:lnSpc>
-              <a:buNone/>
-              <a:defRPr sz="2300" b="0">
-                <a:solidFill>
-                  <a:srgbClr val="27333D"/>
-                </a:solidFill>
-                <a:latin typeface="微软雅黑"/>
-                <a:ea typeface="微软雅黑"/>
-                <a:cs typeface="微软雅黑"/>
-              </a:defRPr>
-            </a:pPr>
-            <a:r>
-              <a:rPr sz="2300" b="0">
-                <a:solidFill>
-                  <a:srgbClr val="27333D"/>
-                </a:solidFill>
-                <a:latin typeface="微软雅黑"/>
-                <a:ea typeface="微软雅黑"/>
-                <a:cs typeface="微软雅黑"/>
-              </a:rPr>
-              <a:t>证据成熟度：满足独立证据条件后才标 stable；方向支持仍需保留未决解释。</a:t>
+              <a:t>6</a:t>
             </a:r>
           </a:p>
         </p:txBody>
@@ -9751,127 +8436,22 @@
       </p:grpSpPr>
       <p:sp>
         <p:nvSpPr>
-          <p:cNvPr id="4" name="Text Placeholder 3">
-            <a:extLst xmlns:a="http://schemas.openxmlformats.org/drawingml/2006/main">
-              <a:ext uri="{FF2B5EF4-FFF2-40B4-BE49-F238E27FC236}">
-                <a16:creationId xmlns:a16="http://schemas.microsoft.com/office/drawing/2014/main" id="{4D941B40-7A0A-534E-3563-CA11753C8E3F}"/>
-              </a:ext>
-            </a:extLst>
-          </p:cNvPr>
-          <p:cNvSpPr>
-            <a:spLocks xmlns:a="http://schemas.openxmlformats.org/drawingml/2006/main" noGrp="1"/>
-          </p:cNvSpPr>
-          <p:nvPr>
-            <p:ph type="body" idx="14"/>
-          </p:nvPr>
-        </p:nvSpPr>
-        <p:spPr>
-          <a:xfrm xmlns:a="http://schemas.openxmlformats.org/drawingml/2006/main">
-            <a:off x="1028700" y="57150"/>
-            <a:ext cx="10668000" cy="571500"/>
-          </a:xfrm>
-        </p:spPr>
-        <p:txBody>
-          <a:bodyPr xmlns:a="http://schemas.openxmlformats.org/drawingml/2006/main" lIns="0" tIns="0" rIns="0" bIns="0" anchor="ctr"/>
-          <a:lstStyle xmlns:a="http://schemas.openxmlformats.org/drawingml/2006/main"/>
-          <a:p xmlns:a="http://schemas.openxmlformats.org/drawingml/2006/main">
-            <a:pPr algn="l">
-              <a:lnSpc>
-                <a:spcPct val="118000"/>
-              </a:lnSpc>
-              <a:buNone/>
-            </a:pPr>
-            <a:r>
-              <a:rPr sz="3000" b="1">
-                <a:solidFill>
-                  <a:srgbClr val="FFFFFF"/>
-                </a:solidFill>
-                <a:latin typeface="微软雅黑"/>
-                <a:ea typeface="微软雅黑"/>
-                <a:cs typeface="微软雅黑"/>
-              </a:rPr>
-              <a:t>工作流演示：展示真实作用与失败</a:t>
-            </a:r>
-            <a:endParaRPr/>
-          </a:p>
-        </p:txBody>
-      </p:sp>
-      <p:sp>
-        <p:nvSpPr>
-          <p:cNvPr id="5" name="Slide Number Placeholder 4">
-            <a:extLst xmlns:a="http://schemas.openxmlformats.org/drawingml/2006/main">
-              <a:ext uri="{FF2B5EF4-FFF2-40B4-BE49-F238E27FC236}">
-                <a16:creationId xmlns:a16="http://schemas.microsoft.com/office/drawing/2014/main" id="{EBA5909F-738E-F60C-BE8C-B3F1D94548E5}"/>
-              </a:ext>
-            </a:extLst>
-          </p:cNvPr>
-          <p:cNvSpPr>
-            <a:spLocks xmlns:a="http://schemas.openxmlformats.org/drawingml/2006/main" noGrp="1"/>
-          </p:cNvSpPr>
-          <p:nvPr>
-            <p:ph type="sldNum" idx="10"/>
-          </p:nvPr>
-        </p:nvSpPr>
-        <p:spPr/>
-        <p:txBody>
-          <a:bodyPr xmlns:a="http://schemas.openxmlformats.org/drawingml/2006/main"/>
-          <a:lstStyle xmlns:a="http://schemas.openxmlformats.org/drawingml/2006/main"/>
-          <a:p xmlns:a="http://schemas.openxmlformats.org/drawingml/2006/main">
-            <a:fld id="{D3D7D1C8-AE23-AA48-DF65-C742588DBE47}" type="slidenum">
-              <a:t>7</a:t>
-            </a:fld>
-            <a:endParaRPr/>
-          </a:p>
-        </p:txBody>
-      </p:sp>
-      <p:sp>
-        <p:nvSpPr>
-          <p:cNvPr id="6" name="process-99">
-            <a:extLst xmlns:a="http://schemas.openxmlformats.org/drawingml/2006/main">
-              <a:ext uri="{FF2B5EF4-FFF2-40B4-BE49-F238E27FC236}">
-                <a16:creationId xmlns:a16="http://schemas.microsoft.com/office/drawing/2014/main" id="{670283FE-EA71-4D28-BD5D-96A63139B0D4}"/>
-              </a:ext>
-            </a:extLst>
-          </p:cNvPr>
-          <p:cNvSpPr>
-            <a:spLocks xmlns:a="http://schemas.openxmlformats.org/drawingml/2006/main" noGrp="1"/>
-          </p:cNvSpPr>
-          <p:nvPr/>
-        </p:nvSpPr>
-        <p:spPr>
-          <a:xfrm xmlns:a="http://schemas.openxmlformats.org/drawingml/2006/main">
-            <a:off x="609600" y="2000250"/>
-            <a:ext cx="1943100" cy="819150"/>
-          </a:xfrm>
-          <a:prstGeom xmlns:a="http://schemas.openxmlformats.org/drawingml/2006/main" prst="rect">
-            <a:avLst/>
-          </a:prstGeom>
-          <a:solidFill xmlns:a="http://schemas.openxmlformats.org/drawingml/2006/main">
-            <a:srgbClr val="EDF5F0"/>
-          </a:solidFill>
-          <a:ln xmlns:a="http://schemas.openxmlformats.org/drawingml/2006/main" w="0">
-            <a:noFill/>
-          </a:ln>
-        </p:spPr>
-      </p:sp>
-      <p:sp>
-        <p:nvSpPr>
-          <p:cNvPr id="7" name="content-100">
-            <a:extLst xmlns:a="http://schemas.openxmlformats.org/drawingml/2006/main">
-              <a:ext uri="{FF2B5EF4-FFF2-40B4-BE49-F238E27FC236}">
-                <a16:creationId xmlns:a16="http://schemas.microsoft.com/office/drawing/2014/main" id="{7F211AEB-EEA0-4DC1-AAE5-FD06D1A02254}"/>
-              </a:ext>
-            </a:extLst>
-          </p:cNvPr>
-          <p:cNvSpPr>
-            <a:spLocks xmlns:a="http://schemas.openxmlformats.org/drawingml/2006/main" noGrp="1"/>
-          </p:cNvSpPr>
-          <p:nvPr/>
-        </p:nvSpPr>
-        <p:spPr>
-          <a:xfrm xmlns:a="http://schemas.openxmlformats.org/drawingml/2006/main">
-            <a:off x="714375" y="2085975"/>
-            <a:ext cx="1733550" cy="647700"/>
+          <p:cNvPr id="7" name="judgment-title">
+            <a:extLst xmlns:a="http://schemas.openxmlformats.org/drawingml/2006/main">
+              <a:ext uri="{FF2B5EF4-FFF2-40B4-BE49-F238E27FC236}">
+                <a16:creationId xmlns:a16="http://schemas.microsoft.com/office/drawing/2014/main" id="{F86088AF-3232-447B-81AB-7828B51283D3}"/>
+              </a:ext>
+            </a:extLst>
+          </p:cNvPr>
+          <p:cNvSpPr>
+            <a:spLocks xmlns:a="http://schemas.openxmlformats.org/drawingml/2006/main" noGrp="1"/>
+          </p:cNvSpPr>
+          <p:nvPr/>
+        </p:nvSpPr>
+        <p:spPr>
+          <a:xfrm xmlns:a="http://schemas.openxmlformats.org/drawingml/2006/main">
+            <a:off x="1028700" y="76200"/>
+            <a:ext cx="10687050" cy="514350"/>
           </a:xfrm>
           <a:prstGeom xmlns:a="http://schemas.openxmlformats.org/drawingml/2006/main" prst="rect">
             <a:avLst/>
@@ -9882,17 +8462,24 @@
           </a:ln>
         </p:spPr>
         <p:txBody>
-          <a:bodyPr xmlns:a="http://schemas.openxmlformats.org/drawingml/2006/main" lIns="0" tIns="0" rIns="0" bIns="0" anchor="ctr"/>
-          <a:lstStyle xmlns:a="http://schemas.openxmlformats.org/drawingml/2006/main"/>
-          <a:p xmlns:a="http://schemas.openxmlformats.org/drawingml/2006/main">
-            <a:pPr algn="ctr">
-              <a:lnSpc>
-                <a:spcPct val="118000"/>
-              </a:lnSpc>
-              <a:buNone/>
-              <a:defRPr sz="2200" b="0">
-                <a:solidFill>
-                  <a:srgbClr val="1F4D78"/>
+          <a:bodyPr xmlns:a="http://schemas.openxmlformats.org/drawingml/2006/main" lIns="0" tIns="0" rIns="0" bIns="0" anchor="t"/>
+          <a:lstStyle xmlns:a="http://schemas.openxmlformats.org/drawingml/2006/main">
+            <a:defPPr algn="l">
+              <a:defRPr sz="3000" b="1">
+                <a:solidFill>
+                  <a:srgbClr val="FFFFFF"/>
+                </a:solidFill>
+                <a:latin typeface="微软雅黑"/>
+                <a:ea typeface="微软雅黑"/>
+                <a:cs typeface="微软雅黑"/>
+              </a:defRPr>
+            </a:defPPr>
+          </a:lstStyle>
+          <a:p xmlns:a="http://schemas.openxmlformats.org/drawingml/2006/main">
+            <a:pPr algn="l">
+              <a:defRPr sz="3000" b="1">
+                <a:solidFill>
+                  <a:srgbClr val="FFFFFF"/>
                 </a:solidFill>
                 <a:latin typeface="微软雅黑"/>
                 <a:ea typeface="微软雅黑"/>
@@ -9900,37 +8487,37 @@
               </a:defRPr>
             </a:pPr>
             <a:r>
-              <a:rPr sz="2200" b="0">
-                <a:solidFill>
-                  <a:srgbClr val="1F4D78"/>
+              <a:rPr sz="3000" b="1">
+                <a:solidFill>
+                  <a:srgbClr val="FFFFFF"/>
                 </a:solidFill>
                 <a:latin typeface="微软雅黑"/>
                 <a:ea typeface="微软雅黑"/>
                 <a:cs typeface="微软雅黑"/>
               </a:rPr>
-              <a:t>输入</a:t>
-            </a:r>
-          </a:p>
-        </p:txBody>
-      </p:sp>
-      <p:sp>
-        <p:nvSpPr>
-          <p:cNvPr id="8" name="content-101">
-            <a:extLst xmlns:a="http://schemas.openxmlformats.org/drawingml/2006/main">
-              <a:ext uri="{FF2B5EF4-FFF2-40B4-BE49-F238E27FC236}">
-                <a16:creationId xmlns:a16="http://schemas.microsoft.com/office/drawing/2014/main" id="{9B927FF3-D07C-4389-A09E-7F52F68A0B32}"/>
-              </a:ext>
-            </a:extLst>
-          </p:cNvPr>
-          <p:cNvSpPr>
-            <a:spLocks xmlns:a="http://schemas.openxmlformats.org/drawingml/2006/main" noGrp="1"/>
-          </p:cNvSpPr>
-          <p:nvPr/>
-        </p:nvSpPr>
-        <p:spPr>
-          <a:xfrm xmlns:a="http://schemas.openxmlformats.org/drawingml/2006/main">
-            <a:off x="2552700" y="2200275"/>
-            <a:ext cx="314325" cy="533400"/>
+              <a:t>本人项目：决定、核验与回写</a:t>
+            </a:r>
+          </a:p>
+        </p:txBody>
+      </p:sp>
+      <p:sp>
+        <p:nvSpPr>
+          <p:cNvPr id="2" name="judgment-body-0">
+            <a:extLst xmlns:a="http://schemas.openxmlformats.org/drawingml/2006/main">
+              <a:ext uri="{FF2B5EF4-FFF2-40B4-BE49-F238E27FC236}">
+                <a16:creationId xmlns:a16="http://schemas.microsoft.com/office/drawing/2014/main" id="{C986BEF2-A498-4CB3-AE33-913603095953}"/>
+              </a:ext>
+            </a:extLst>
+          </p:cNvPr>
+          <p:cNvSpPr>
+            <a:spLocks xmlns:a="http://schemas.openxmlformats.org/drawingml/2006/main" noGrp="1"/>
+          </p:cNvSpPr>
+          <p:nvPr/>
+        </p:nvSpPr>
+        <p:spPr>
+          <a:xfrm xmlns:a="http://schemas.openxmlformats.org/drawingml/2006/main">
+            <a:off x="666750" y="1066800"/>
+            <a:ext cx="10858500" cy="1476375"/>
           </a:xfrm>
           <a:prstGeom xmlns:a="http://schemas.openxmlformats.org/drawingml/2006/main" prst="rect">
             <a:avLst/>
@@ -9942,16 +8529,23 @@
         </p:spPr>
         <p:txBody>
           <a:bodyPr xmlns:a="http://schemas.openxmlformats.org/drawingml/2006/main" lIns="0" tIns="0" rIns="0" bIns="0" anchor="t"/>
-          <a:lstStyle xmlns:a="http://schemas.openxmlformats.org/drawingml/2006/main"/>
-          <a:p xmlns:a="http://schemas.openxmlformats.org/drawingml/2006/main">
-            <a:pPr algn="ctr">
-              <a:lnSpc>
-                <a:spcPct val="118000"/>
-              </a:lnSpc>
-              <a:buNone/>
-              <a:defRPr sz="2500" b="0">
-                <a:solidFill>
-                  <a:srgbClr val="1F4D78"/>
+          <a:lstStyle xmlns:a="http://schemas.openxmlformats.org/drawingml/2006/main">
+            <a:defPPr algn="l">
+              <a:defRPr sz="2400" b="0">
+                <a:solidFill>
+                  <a:srgbClr val="263746"/>
+                </a:solidFill>
+                <a:latin typeface="微软雅黑"/>
+                <a:ea typeface="微软雅黑"/>
+                <a:cs typeface="微软雅黑"/>
+              </a:defRPr>
+            </a:defPPr>
+          </a:lstStyle>
+          <a:p xmlns:a="http://schemas.openxmlformats.org/drawingml/2006/main">
+            <a:pPr algn="l">
+              <a:defRPr sz="2400" b="0">
+                <a:solidFill>
+                  <a:srgbClr val="263746"/>
                 </a:solidFill>
                 <a:latin typeface="微软雅黑"/>
                 <a:ea typeface="微软雅黑"/>
@@ -9959,67 +8553,37 @@
               </a:defRPr>
             </a:pPr>
             <a:r>
-              <a:rPr sz="2500" b="0">
-                <a:solidFill>
-                  <a:srgbClr val="1F4D78"/>
+              <a:rPr sz="2400" b="0">
+                <a:solidFill>
+                  <a:srgbClr val="263746"/>
                 </a:solidFill>
                 <a:latin typeface="微软雅黑"/>
                 <a:ea typeface="微软雅黑"/>
                 <a:cs typeface="微软雅黑"/>
               </a:rPr>
-              <a:t>→</a:t>
-            </a:r>
-          </a:p>
-        </p:txBody>
-      </p:sp>
-      <p:sp>
-        <p:nvSpPr>
-          <p:cNvPr id="9" name="process-102">
-            <a:extLst xmlns:a="http://schemas.openxmlformats.org/drawingml/2006/main">
-              <a:ext uri="{FF2B5EF4-FFF2-40B4-BE49-F238E27FC236}">
-                <a16:creationId xmlns:a16="http://schemas.microsoft.com/office/drawing/2014/main" id="{6217AD9A-2A2F-4A2A-B1DA-2CEB821DC359}"/>
-              </a:ext>
-            </a:extLst>
-          </p:cNvPr>
-          <p:cNvSpPr>
-            <a:spLocks xmlns:a="http://schemas.openxmlformats.org/drawingml/2006/main" noGrp="1"/>
-          </p:cNvSpPr>
-          <p:nvPr/>
-        </p:nvSpPr>
-        <p:spPr>
-          <a:xfrm xmlns:a="http://schemas.openxmlformats.org/drawingml/2006/main">
-            <a:off x="2867025" y="2000250"/>
-            <a:ext cx="1943100" cy="819150"/>
-          </a:xfrm>
-          <a:prstGeom xmlns:a="http://schemas.openxmlformats.org/drawingml/2006/main" prst="rect">
-            <a:avLst/>
-          </a:prstGeom>
-          <a:solidFill xmlns:a="http://schemas.openxmlformats.org/drawingml/2006/main">
-            <a:srgbClr val="F4F6F8"/>
-          </a:solidFill>
-          <a:ln xmlns:a="http://schemas.openxmlformats.org/drawingml/2006/main" w="0">
-            <a:noFill/>
-          </a:ln>
-        </p:spPr>
-      </p:sp>
-      <p:sp>
-        <p:nvSpPr>
-          <p:cNvPr id="10" name="content-103">
-            <a:extLst xmlns:a="http://schemas.openxmlformats.org/drawingml/2006/main">
-              <a:ext uri="{FF2B5EF4-FFF2-40B4-BE49-F238E27FC236}">
-                <a16:creationId xmlns:a16="http://schemas.microsoft.com/office/drawing/2014/main" id="{71E8362B-CC92-45B1-B5AB-EE7FAB8006B6}"/>
-              </a:ext>
-            </a:extLst>
-          </p:cNvPr>
-          <p:cNvSpPr>
-            <a:spLocks xmlns:a="http://schemas.openxmlformats.org/drawingml/2006/main" noGrp="1"/>
-          </p:cNvSpPr>
-          <p:nvPr/>
-        </p:nvSpPr>
-        <p:spPr>
-          <a:xfrm xmlns:a="http://schemas.openxmlformats.org/drawingml/2006/main">
-            <a:off x="2971800" y="2085975"/>
-            <a:ext cx="1733550" cy="647700"/>
+              <a:t>全员闪电展示；固定 3–4 人组轮流反查。直接打开现有材料，说明一个关键取舍、失败或未决问题，并完成最终提交与复盘。</a:t>
+            </a:r>
+          </a:p>
+        </p:txBody>
+      </p:sp>
+      <p:sp>
+        <p:nvSpPr>
+          <p:cNvPr id="3" name="judgment-body-1">
+            <a:extLst xmlns:a="http://schemas.openxmlformats.org/drawingml/2006/main">
+              <a:ext uri="{FF2B5EF4-FFF2-40B4-BE49-F238E27FC236}">
+                <a16:creationId xmlns:a16="http://schemas.microsoft.com/office/drawing/2014/main" id="{F666C94F-E2F1-4D37-AE67-FC36A8D88233}"/>
+              </a:ext>
+            </a:extLst>
+          </p:cNvPr>
+          <p:cNvSpPr>
+            <a:spLocks xmlns:a="http://schemas.openxmlformats.org/drawingml/2006/main" noGrp="1"/>
+          </p:cNvSpPr>
+          <p:nvPr/>
+        </p:nvSpPr>
+        <p:spPr>
+          <a:xfrm xmlns:a="http://schemas.openxmlformats.org/drawingml/2006/main">
+            <a:off x="666750" y="2724150"/>
+            <a:ext cx="10858500" cy="1524000"/>
           </a:xfrm>
           <a:prstGeom xmlns:a="http://schemas.openxmlformats.org/drawingml/2006/main" prst="rect">
             <a:avLst/>
@@ -10030,17 +8594,24 @@
           </a:ln>
         </p:spPr>
         <p:txBody>
-          <a:bodyPr xmlns:a="http://schemas.openxmlformats.org/drawingml/2006/main" lIns="0" tIns="0" rIns="0" bIns="0" anchor="ctr"/>
-          <a:lstStyle xmlns:a="http://schemas.openxmlformats.org/drawingml/2006/main"/>
-          <a:p xmlns:a="http://schemas.openxmlformats.org/drawingml/2006/main">
-            <a:pPr algn="ctr">
-              <a:lnSpc>
-                <a:spcPct val="118000"/>
-              </a:lnSpc>
-              <a:buNone/>
-              <a:defRPr sz="2200" b="0">
-                <a:solidFill>
-                  <a:srgbClr val="1F4D78"/>
+          <a:bodyPr xmlns:a="http://schemas.openxmlformats.org/drawingml/2006/main" lIns="0" tIns="0" rIns="0" bIns="0" anchor="t"/>
+          <a:lstStyle xmlns:a="http://schemas.openxmlformats.org/drawingml/2006/main">
+            <a:defPPr algn="l">
+              <a:defRPr sz="2400" b="0">
+                <a:solidFill>
+                  <a:srgbClr val="263746"/>
+                </a:solidFill>
+                <a:latin typeface="微软雅黑"/>
+                <a:ea typeface="微软雅黑"/>
+                <a:cs typeface="微软雅黑"/>
+              </a:defRPr>
+            </a:defPPr>
+          </a:lstStyle>
+          <a:p xmlns:a="http://schemas.openxmlformats.org/drawingml/2006/main">
+            <a:pPr algn="l">
+              <a:defRPr sz="2400" b="0">
+                <a:solidFill>
+                  <a:srgbClr val="263746"/>
                 </a:solidFill>
                 <a:latin typeface="微软雅黑"/>
                 <a:ea typeface="微软雅黑"/>
@@ -10048,37 +8619,37 @@
               </a:defRPr>
             </a:pPr>
             <a:r>
-              <a:rPr sz="2200" b="0">
-                <a:solidFill>
-                  <a:srgbClr val="1F4D78"/>
+              <a:rPr sz="2400" b="0">
+                <a:solidFill>
+                  <a:srgbClr val="263746"/>
                 </a:solidFill>
                 <a:latin typeface="微软雅黑"/>
                 <a:ea typeface="微软雅黑"/>
                 <a:cs typeface="微软雅黑"/>
               </a:rPr>
-              <a:t>权限边界</a:t>
-            </a:r>
-          </a:p>
-        </p:txBody>
-      </p:sp>
-      <p:sp>
-        <p:nvSpPr>
-          <p:cNvPr id="11" name="content-104">
-            <a:extLst xmlns:a="http://schemas.openxmlformats.org/drawingml/2006/main">
-              <a:ext uri="{FF2B5EF4-FFF2-40B4-BE49-F238E27FC236}">
-                <a16:creationId xmlns:a16="http://schemas.microsoft.com/office/drawing/2014/main" id="{BBC6D155-7D2B-413A-B0FF-EB72286252A9}"/>
-              </a:ext>
-            </a:extLst>
-          </p:cNvPr>
-          <p:cNvSpPr>
-            <a:spLocks xmlns:a="http://schemas.openxmlformats.org/drawingml/2006/main" noGrp="1"/>
-          </p:cNvSpPr>
-          <p:nvPr/>
-        </p:nvSpPr>
-        <p:spPr>
-          <a:xfrm xmlns:a="http://schemas.openxmlformats.org/drawingml/2006/main">
-            <a:off x="4810125" y="2200275"/>
-            <a:ext cx="314325" cy="533400"/>
+              <a:t>每位学生留一条由真实同伴完成的反查记录；教师另记抽查对象与范围。断网使用本地工件，机器故障展示保存 trace 并约定实际运行复核。</a:t>
+            </a:r>
+          </a:p>
+        </p:txBody>
+      </p:sp>
+      <p:sp>
+        <p:nvSpPr>
+          <p:cNvPr id="4" name="judgment-body-2">
+            <a:extLst xmlns:a="http://schemas.openxmlformats.org/drawingml/2006/main">
+              <a:ext uri="{FF2B5EF4-FFF2-40B4-BE49-F238E27FC236}">
+                <a16:creationId xmlns:a16="http://schemas.microsoft.com/office/drawing/2014/main" id="{B8940EFB-F5EA-48C3-820D-6257BF5CF80C}"/>
+              </a:ext>
+            </a:extLst>
+          </p:cNvPr>
+          <p:cNvSpPr>
+            <a:spLocks xmlns:a="http://schemas.openxmlformats.org/drawingml/2006/main" noGrp="1"/>
+          </p:cNvSpPr>
+          <p:nvPr/>
+        </p:nvSpPr>
+        <p:spPr>
+          <a:xfrm xmlns:a="http://schemas.openxmlformats.org/drawingml/2006/main">
+            <a:off x="666750" y="4457700"/>
+            <a:ext cx="10858500" cy="1466850"/>
           </a:xfrm>
           <a:prstGeom xmlns:a="http://schemas.openxmlformats.org/drawingml/2006/main" prst="rect">
             <a:avLst/>
@@ -10090,14 +8661,9 @@
         </p:spPr>
         <p:txBody>
           <a:bodyPr xmlns:a="http://schemas.openxmlformats.org/drawingml/2006/main" lIns="0" tIns="0" rIns="0" bIns="0" anchor="t"/>
-          <a:lstStyle xmlns:a="http://schemas.openxmlformats.org/drawingml/2006/main"/>
-          <a:p xmlns:a="http://schemas.openxmlformats.org/drawingml/2006/main">
-            <a:pPr algn="ctr">
-              <a:lnSpc>
-                <a:spcPct val="118000"/>
-              </a:lnSpc>
-              <a:buNone/>
-              <a:defRPr sz="2500" b="0">
+          <a:lstStyle xmlns:a="http://schemas.openxmlformats.org/drawingml/2006/main">
+            <a:defPPr algn="l">
+              <a:defRPr sz="2200" b="0">
                 <a:solidFill>
                   <a:srgbClr val="1F4D78"/>
                 </a:solidFill>
@@ -10105,9 +8671,21 @@
                 <a:ea typeface="微软雅黑"/>
                 <a:cs typeface="微软雅黑"/>
               </a:defRPr>
+            </a:defPPr>
+          </a:lstStyle>
+          <a:p xmlns:a="http://schemas.openxmlformats.org/drawingml/2006/main">
+            <a:pPr algn="l">
+              <a:defRPr sz="2200" b="0">
+                <a:solidFill>
+                  <a:srgbClr val="1F4D78"/>
+                </a:solidFill>
+                <a:latin typeface="微软雅黑"/>
+                <a:ea typeface="微软雅黑"/>
+                <a:cs typeface="微软雅黑"/>
+              </a:defRPr>
             </a:pPr>
             <a:r>
-              <a:rPr sz="2500" b="0">
+              <a:rPr sz="2200" b="0">
                 <a:solidFill>
                   <a:srgbClr val="1F4D78"/>
                 </a:solidFill>
@@ -10115,59 +8693,29 @@
                 <a:ea typeface="微软雅黑"/>
                 <a:cs typeface="微软雅黑"/>
               </a:rPr>
-              <a:t>→</a:t>
-            </a:r>
-          </a:p>
-        </p:txBody>
-      </p:sp>
-      <p:sp>
-        <p:nvSpPr>
-          <p:cNvPr id="12" name="process-105">
-            <a:extLst xmlns:a="http://schemas.openxmlformats.org/drawingml/2006/main">
-              <a:ext uri="{FF2B5EF4-FFF2-40B4-BE49-F238E27FC236}">
-                <a16:creationId xmlns:a16="http://schemas.microsoft.com/office/drawing/2014/main" id="{DC5AFCCD-71FA-4C1C-9287-713042979D77}"/>
-              </a:ext>
-            </a:extLst>
-          </p:cNvPr>
-          <p:cNvSpPr>
-            <a:spLocks xmlns:a="http://schemas.openxmlformats.org/drawingml/2006/main" noGrp="1"/>
-          </p:cNvSpPr>
-          <p:nvPr/>
-        </p:nvSpPr>
-        <p:spPr>
-          <a:xfrm xmlns:a="http://schemas.openxmlformats.org/drawingml/2006/main">
-            <a:off x="5124450" y="2000250"/>
-            <a:ext cx="1943100" cy="819150"/>
-          </a:xfrm>
-          <a:prstGeom xmlns:a="http://schemas.openxmlformats.org/drawingml/2006/main" prst="rect">
-            <a:avLst/>
-          </a:prstGeom>
-          <a:solidFill xmlns:a="http://schemas.openxmlformats.org/drawingml/2006/main">
-            <a:srgbClr val="F4F6F8"/>
-          </a:solidFill>
-          <a:ln xmlns:a="http://schemas.openxmlformats.org/drawingml/2006/main" w="0">
-            <a:noFill/>
-          </a:ln>
-        </p:spPr>
-      </p:sp>
-      <p:sp>
-        <p:nvSpPr>
-          <p:cNvPr id="13" name="content-106">
-            <a:extLst xmlns:a="http://schemas.openxmlformats.org/drawingml/2006/main">
-              <a:ext uri="{FF2B5EF4-FFF2-40B4-BE49-F238E27FC236}">
-                <a16:creationId xmlns:a16="http://schemas.microsoft.com/office/drawing/2014/main" id="{6F9DA5E4-CF41-4901-A082-872D4F5F36C7}"/>
-              </a:ext>
-            </a:extLst>
-          </p:cNvPr>
-          <p:cNvSpPr>
-            <a:spLocks xmlns:a="http://schemas.openxmlformats.org/drawingml/2006/main" noGrp="1"/>
-          </p:cNvSpPr>
-          <p:nvPr/>
-        </p:nvSpPr>
-        <p:spPr>
-          <a:xfrm xmlns:a="http://schemas.openxmlformats.org/drawingml/2006/main">
-            <a:off x="5229225" y="2085975"/>
-            <a:ext cx="1733550" cy="647700"/>
+              <a:t>保存：论证门与最终个人项目：报告、工作流、原始证据与复盘</a:t>
+            </a:r>
+          </a:p>
+        </p:txBody>
+      </p:sp>
+      <p:sp>
+        <p:nvSpPr>
+          <p:cNvPr id="5" name="judgment-source">
+            <a:extLst xmlns:a="http://schemas.openxmlformats.org/drawingml/2006/main">
+              <a:ext uri="{FF2B5EF4-FFF2-40B4-BE49-F238E27FC236}">
+                <a16:creationId xmlns:a16="http://schemas.microsoft.com/office/drawing/2014/main" id="{C1768726-7974-450A-BFDA-ADE9CAB88032}"/>
+              </a:ext>
+            </a:extLst>
+          </p:cNvPr>
+          <p:cNvSpPr>
+            <a:spLocks xmlns:a="http://schemas.openxmlformats.org/drawingml/2006/main" noGrp="1"/>
+          </p:cNvSpPr>
+          <p:nvPr/>
+        </p:nvSpPr>
+        <p:spPr>
+          <a:xfrm xmlns:a="http://schemas.openxmlformats.org/drawingml/2006/main">
+            <a:off x="666750" y="6276975"/>
+            <a:ext cx="10572750" cy="209550"/>
           </a:xfrm>
           <a:prstGeom xmlns:a="http://schemas.openxmlformats.org/drawingml/2006/main" prst="rect">
             <a:avLst/>
@@ -10178,17 +8726,24 @@
           </a:ln>
         </p:spPr>
         <p:txBody>
-          <a:bodyPr xmlns:a="http://schemas.openxmlformats.org/drawingml/2006/main" lIns="0" tIns="0" rIns="0" bIns="0" anchor="ctr"/>
-          <a:lstStyle xmlns:a="http://schemas.openxmlformats.org/drawingml/2006/main"/>
-          <a:p xmlns:a="http://schemas.openxmlformats.org/drawingml/2006/main">
-            <a:pPr algn="ctr">
-              <a:lnSpc>
-                <a:spcPct val="118000"/>
-              </a:lnSpc>
-              <a:buNone/>
-              <a:defRPr sz="2200" b="0">
-                <a:solidFill>
-                  <a:srgbClr val="1F4D78"/>
+          <a:bodyPr xmlns:a="http://schemas.openxmlformats.org/drawingml/2006/main" lIns="0" tIns="0" rIns="0" bIns="0" anchor="t"/>
+          <a:lstStyle xmlns:a="http://schemas.openxmlformats.org/drawingml/2006/main">
+            <a:defPPr algn="l">
+              <a:defRPr sz="1100" b="0">
+                <a:solidFill>
+                  <a:srgbClr val="667684"/>
+                </a:solidFill>
+                <a:latin typeface="微软雅黑"/>
+                <a:ea typeface="微软雅黑"/>
+                <a:cs typeface="微软雅黑"/>
+              </a:defRPr>
+            </a:defPPr>
+          </a:lstStyle>
+          <a:p xmlns:a="http://schemas.openxmlformats.org/drawingml/2006/main">
+            <a:pPr algn="l">
+              <a:defRPr sz="1100" b="0">
+                <a:solidFill>
+                  <a:srgbClr val="667684"/>
                 </a:solidFill>
                 <a:latin typeface="微软雅黑"/>
                 <a:ea typeface="微软雅黑"/>
@@ -10196,37 +8751,37 @@
               </a:defRPr>
             </a:pPr>
             <a:r>
-              <a:rPr sz="2200" b="0">
-                <a:solidFill>
-                  <a:srgbClr val="1F4D78"/>
+              <a:rPr sz="1100" b="0">
+                <a:solidFill>
+                  <a:srgbClr val="667684"/>
                 </a:solidFill>
                 <a:latin typeface="微软雅黑"/>
                 <a:ea typeface="微软雅黑"/>
                 <a:cs typeface="微软雅黑"/>
               </a:rPr>
-              <a:t>执行</a:t>
-            </a:r>
-          </a:p>
-        </p:txBody>
-      </p:sp>
-      <p:sp>
-        <p:nvSpPr>
-          <p:cNvPr id="14" name="content-107">
-            <a:extLst xmlns:a="http://schemas.openxmlformats.org/drawingml/2006/main">
-              <a:ext uri="{FF2B5EF4-FFF2-40B4-BE49-F238E27FC236}">
-                <a16:creationId xmlns:a16="http://schemas.microsoft.com/office/drawing/2014/main" id="{C61F997B-56B1-4D69-B11F-486BBAE1E5ED}"/>
-              </a:ext>
-            </a:extLst>
-          </p:cNvPr>
-          <p:cNvSpPr>
-            <a:spLocks xmlns:a="http://schemas.openxmlformats.org/drawingml/2006/main" noGrp="1"/>
-          </p:cNvSpPr>
-          <p:nvPr/>
-        </p:nvSpPr>
-        <p:spPr>
-          <a:xfrm xmlns:a="http://schemas.openxmlformats.org/drawingml/2006/main">
-            <a:off x="7067550" y="2200275"/>
-            <a:ext cx="314325" cy="533400"/>
+              <a:t>来源：本课判断任务与讲义；构造材料及真实来源按材料包标识</a:t>
+            </a:r>
+          </a:p>
+        </p:txBody>
+      </p:sp>
+      <p:sp>
+        <p:nvSpPr>
+          <p:cNvPr id="6" name="judgment-page">
+            <a:extLst xmlns:a="http://schemas.openxmlformats.org/drawingml/2006/main">
+              <a:ext uri="{FF2B5EF4-FFF2-40B4-BE49-F238E27FC236}">
+                <a16:creationId xmlns:a16="http://schemas.microsoft.com/office/drawing/2014/main" id="{012A971A-18E5-4D43-8DB0-FAE98DAE6A49}"/>
+              </a:ext>
+            </a:extLst>
+          </p:cNvPr>
+          <p:cNvSpPr>
+            <a:spLocks xmlns:a="http://schemas.openxmlformats.org/drawingml/2006/main" noGrp="1"/>
+          </p:cNvSpPr>
+          <p:nvPr/>
+        </p:nvSpPr>
+        <p:spPr>
+          <a:xfrm xmlns:a="http://schemas.openxmlformats.org/drawingml/2006/main">
+            <a:off x="11715750" y="6562725"/>
+            <a:ext cx="238125" cy="171450"/>
           </a:xfrm>
           <a:prstGeom xmlns:a="http://schemas.openxmlformats.org/drawingml/2006/main" prst="rect">
             <a:avLst/>
@@ -10238,16 +8793,23 @@
         </p:spPr>
         <p:txBody>
           <a:bodyPr xmlns:a="http://schemas.openxmlformats.org/drawingml/2006/main" lIns="0" tIns="0" rIns="0" bIns="0" anchor="t"/>
-          <a:lstStyle xmlns:a="http://schemas.openxmlformats.org/drawingml/2006/main"/>
-          <a:p xmlns:a="http://schemas.openxmlformats.org/drawingml/2006/main">
-            <a:pPr algn="ctr">
-              <a:lnSpc>
-                <a:spcPct val="118000"/>
-              </a:lnSpc>
-              <a:buNone/>
-              <a:defRPr sz="2500" b="0">
-                <a:solidFill>
-                  <a:srgbClr val="1F4D78"/>
+          <a:lstStyle xmlns:a="http://schemas.openxmlformats.org/drawingml/2006/main">
+            <a:defPPr algn="l">
+              <a:defRPr sz="900" b="0">
+                <a:solidFill>
+                  <a:srgbClr val="A5A5A5"/>
+                </a:solidFill>
+                <a:latin typeface="微软雅黑"/>
+                <a:ea typeface="微软雅黑"/>
+                <a:cs typeface="微软雅黑"/>
+              </a:defRPr>
+            </a:defPPr>
+          </a:lstStyle>
+          <a:p xmlns:a="http://schemas.openxmlformats.org/drawingml/2006/main">
+            <a:pPr algn="l">
+              <a:defRPr sz="900" b="0">
+                <a:solidFill>
+                  <a:srgbClr val="A5A5A5"/>
                 </a:solidFill>
                 <a:latin typeface="微软雅黑"/>
                 <a:ea typeface="微软雅黑"/>
@@ -10255,488 +8817,15 @@
               </a:defRPr>
             </a:pPr>
             <a:r>
-              <a:rPr sz="2500" b="0">
-                <a:solidFill>
-                  <a:srgbClr val="1F4D78"/>
+              <a:rPr sz="900" b="0">
+                <a:solidFill>
+                  <a:srgbClr val="A5A5A5"/>
                 </a:solidFill>
                 <a:latin typeface="微软雅黑"/>
                 <a:ea typeface="微软雅黑"/>
                 <a:cs typeface="微软雅黑"/>
               </a:rPr>
-              <a:t>→</a:t>
-            </a:r>
-          </a:p>
-        </p:txBody>
-      </p:sp>
-      <p:sp>
-        <p:nvSpPr>
-          <p:cNvPr id="15" name="process-108">
-            <a:extLst xmlns:a="http://schemas.openxmlformats.org/drawingml/2006/main">
-              <a:ext uri="{FF2B5EF4-FFF2-40B4-BE49-F238E27FC236}">
-                <a16:creationId xmlns:a16="http://schemas.microsoft.com/office/drawing/2014/main" id="{3464211D-07FB-422D-8512-1381932D8CB8}"/>
-              </a:ext>
-            </a:extLst>
-          </p:cNvPr>
-          <p:cNvSpPr>
-            <a:spLocks xmlns:a="http://schemas.openxmlformats.org/drawingml/2006/main" noGrp="1"/>
-          </p:cNvSpPr>
-          <p:nvPr/>
-        </p:nvSpPr>
-        <p:spPr>
-          <a:xfrm xmlns:a="http://schemas.openxmlformats.org/drawingml/2006/main">
-            <a:off x="7381875" y="2000250"/>
-            <a:ext cx="1943100" cy="819150"/>
-          </a:xfrm>
-          <a:prstGeom xmlns:a="http://schemas.openxmlformats.org/drawingml/2006/main" prst="rect">
-            <a:avLst/>
-          </a:prstGeom>
-          <a:solidFill xmlns:a="http://schemas.openxmlformats.org/drawingml/2006/main">
-            <a:srgbClr val="F4F6F8"/>
-          </a:solidFill>
-          <a:ln xmlns:a="http://schemas.openxmlformats.org/drawingml/2006/main" w="0">
-            <a:noFill/>
-          </a:ln>
-        </p:spPr>
-      </p:sp>
-      <p:sp>
-        <p:nvSpPr>
-          <p:cNvPr id="16" name="content-109">
-            <a:extLst xmlns:a="http://schemas.openxmlformats.org/drawingml/2006/main">
-              <a:ext uri="{FF2B5EF4-FFF2-40B4-BE49-F238E27FC236}">
-                <a16:creationId xmlns:a16="http://schemas.microsoft.com/office/drawing/2014/main" id="{55F0C649-FC11-4843-B5E2-1945784A0635}"/>
-              </a:ext>
-            </a:extLst>
-          </p:cNvPr>
-          <p:cNvSpPr>
-            <a:spLocks xmlns:a="http://schemas.openxmlformats.org/drawingml/2006/main" noGrp="1"/>
-          </p:cNvSpPr>
-          <p:nvPr/>
-        </p:nvSpPr>
-        <p:spPr>
-          <a:xfrm xmlns:a="http://schemas.openxmlformats.org/drawingml/2006/main">
-            <a:off x="7486650" y="2085975"/>
-            <a:ext cx="1733550" cy="647700"/>
-          </a:xfrm>
-          <a:prstGeom xmlns:a="http://schemas.openxmlformats.org/drawingml/2006/main" prst="rect">
-            <a:avLst/>
-          </a:prstGeom>
-          <a:noFill xmlns:a="http://schemas.openxmlformats.org/drawingml/2006/main"/>
-          <a:ln xmlns:a="http://schemas.openxmlformats.org/drawingml/2006/main" w="0">
-            <a:noFill/>
-          </a:ln>
-        </p:spPr>
-        <p:txBody>
-          <a:bodyPr xmlns:a="http://schemas.openxmlformats.org/drawingml/2006/main" lIns="0" tIns="0" rIns="0" bIns="0" anchor="ctr"/>
-          <a:lstStyle xmlns:a="http://schemas.openxmlformats.org/drawingml/2006/main"/>
-          <a:p xmlns:a="http://schemas.openxmlformats.org/drawingml/2006/main">
-            <a:pPr algn="ctr">
-              <a:lnSpc>
-                <a:spcPct val="118000"/>
-              </a:lnSpc>
-              <a:buNone/>
-              <a:defRPr sz="2200" b="0">
-                <a:solidFill>
-                  <a:srgbClr val="1F4D78"/>
-                </a:solidFill>
-                <a:latin typeface="微软雅黑"/>
-                <a:ea typeface="微软雅黑"/>
-                <a:cs typeface="微软雅黑"/>
-              </a:defRPr>
-            </a:pPr>
-            <a:r>
-              <a:rPr sz="2200" b="0">
-                <a:solidFill>
-                  <a:srgbClr val="1F4D78"/>
-                </a:solidFill>
-                <a:latin typeface="微软雅黑"/>
-                <a:ea typeface="微软雅黑"/>
-                <a:cs typeface="微软雅黑"/>
-              </a:rPr>
-              <a:t>人工审核</a:t>
-            </a:r>
-          </a:p>
-        </p:txBody>
-      </p:sp>
-      <p:sp>
-        <p:nvSpPr>
-          <p:cNvPr id="17" name="content-110">
-            <a:extLst xmlns:a="http://schemas.openxmlformats.org/drawingml/2006/main">
-              <a:ext uri="{FF2B5EF4-FFF2-40B4-BE49-F238E27FC236}">
-                <a16:creationId xmlns:a16="http://schemas.microsoft.com/office/drawing/2014/main" id="{168CE0BB-B80B-4B1E-89BE-01E6A5230E6E}"/>
-              </a:ext>
-            </a:extLst>
-          </p:cNvPr>
-          <p:cNvSpPr>
-            <a:spLocks xmlns:a="http://schemas.openxmlformats.org/drawingml/2006/main" noGrp="1"/>
-          </p:cNvSpPr>
-          <p:nvPr/>
-        </p:nvSpPr>
-        <p:spPr>
-          <a:xfrm xmlns:a="http://schemas.openxmlformats.org/drawingml/2006/main">
-            <a:off x="9324975" y="2200275"/>
-            <a:ext cx="314325" cy="533400"/>
-          </a:xfrm>
-          <a:prstGeom xmlns:a="http://schemas.openxmlformats.org/drawingml/2006/main" prst="rect">
-            <a:avLst/>
-          </a:prstGeom>
-          <a:noFill xmlns:a="http://schemas.openxmlformats.org/drawingml/2006/main"/>
-          <a:ln xmlns:a="http://schemas.openxmlformats.org/drawingml/2006/main" w="0">
-            <a:noFill/>
-          </a:ln>
-        </p:spPr>
-        <p:txBody>
-          <a:bodyPr xmlns:a="http://schemas.openxmlformats.org/drawingml/2006/main" lIns="0" tIns="0" rIns="0" bIns="0" anchor="t"/>
-          <a:lstStyle xmlns:a="http://schemas.openxmlformats.org/drawingml/2006/main"/>
-          <a:p xmlns:a="http://schemas.openxmlformats.org/drawingml/2006/main">
-            <a:pPr algn="ctr">
-              <a:lnSpc>
-                <a:spcPct val="118000"/>
-              </a:lnSpc>
-              <a:buNone/>
-              <a:defRPr sz="2500" b="0">
-                <a:solidFill>
-                  <a:srgbClr val="1F4D78"/>
-                </a:solidFill>
-                <a:latin typeface="微软雅黑"/>
-                <a:ea typeface="微软雅黑"/>
-                <a:cs typeface="微软雅黑"/>
-              </a:defRPr>
-            </a:pPr>
-            <a:r>
-              <a:rPr sz="2500" b="0">
-                <a:solidFill>
-                  <a:srgbClr val="1F4D78"/>
-                </a:solidFill>
-                <a:latin typeface="微软雅黑"/>
-                <a:ea typeface="微软雅黑"/>
-                <a:cs typeface="微软雅黑"/>
-              </a:rPr>
-              <a:t>→</a:t>
-            </a:r>
-          </a:p>
-        </p:txBody>
-      </p:sp>
-      <p:sp>
-        <p:nvSpPr>
-          <p:cNvPr id="18" name="process-111">
-            <a:extLst xmlns:a="http://schemas.openxmlformats.org/drawingml/2006/main">
-              <a:ext uri="{FF2B5EF4-FFF2-40B4-BE49-F238E27FC236}">
-                <a16:creationId xmlns:a16="http://schemas.microsoft.com/office/drawing/2014/main" id="{94E587E0-376A-4CEA-A8EA-10D26B11ED58}"/>
-              </a:ext>
-            </a:extLst>
-          </p:cNvPr>
-          <p:cNvSpPr>
-            <a:spLocks xmlns:a="http://schemas.openxmlformats.org/drawingml/2006/main" noGrp="1"/>
-          </p:cNvSpPr>
-          <p:nvPr/>
-        </p:nvSpPr>
-        <p:spPr>
-          <a:xfrm xmlns:a="http://schemas.openxmlformats.org/drawingml/2006/main">
-            <a:off x="9639300" y="2000250"/>
-            <a:ext cx="1943100" cy="819150"/>
-          </a:xfrm>
-          <a:prstGeom xmlns:a="http://schemas.openxmlformats.org/drawingml/2006/main" prst="rect">
-            <a:avLst/>
-          </a:prstGeom>
-          <a:solidFill xmlns:a="http://schemas.openxmlformats.org/drawingml/2006/main">
-            <a:srgbClr val="F4F6F8"/>
-          </a:solidFill>
-          <a:ln xmlns:a="http://schemas.openxmlformats.org/drawingml/2006/main" w="0">
-            <a:noFill/>
-          </a:ln>
-        </p:spPr>
-      </p:sp>
-      <p:sp>
-        <p:nvSpPr>
-          <p:cNvPr id="19" name="content-112">
-            <a:extLst xmlns:a="http://schemas.openxmlformats.org/drawingml/2006/main">
-              <a:ext uri="{FF2B5EF4-FFF2-40B4-BE49-F238E27FC236}">
-                <a16:creationId xmlns:a16="http://schemas.microsoft.com/office/drawing/2014/main" id="{4BFE2466-43FF-4053-81C8-207CED285FCE}"/>
-              </a:ext>
-            </a:extLst>
-          </p:cNvPr>
-          <p:cNvSpPr>
-            <a:spLocks xmlns:a="http://schemas.openxmlformats.org/drawingml/2006/main" noGrp="1"/>
-          </p:cNvSpPr>
-          <p:nvPr/>
-        </p:nvSpPr>
-        <p:spPr>
-          <a:xfrm xmlns:a="http://schemas.openxmlformats.org/drawingml/2006/main">
-            <a:off x="9744075" y="2085975"/>
-            <a:ext cx="1733550" cy="647700"/>
-          </a:xfrm>
-          <a:prstGeom xmlns:a="http://schemas.openxmlformats.org/drawingml/2006/main" prst="rect">
-            <a:avLst/>
-          </a:prstGeom>
-          <a:noFill xmlns:a="http://schemas.openxmlformats.org/drawingml/2006/main"/>
-          <a:ln xmlns:a="http://schemas.openxmlformats.org/drawingml/2006/main" w="0">
-            <a:noFill/>
-          </a:ln>
-        </p:spPr>
-        <p:txBody>
-          <a:bodyPr xmlns:a="http://schemas.openxmlformats.org/drawingml/2006/main" lIns="0" tIns="0" rIns="0" bIns="0" anchor="ctr"/>
-          <a:lstStyle xmlns:a="http://schemas.openxmlformats.org/drawingml/2006/main"/>
-          <a:p xmlns:a="http://schemas.openxmlformats.org/drawingml/2006/main">
-            <a:pPr algn="ctr">
-              <a:lnSpc>
-                <a:spcPct val="118000"/>
-              </a:lnSpc>
-              <a:buNone/>
-              <a:defRPr sz="2200" b="0">
-                <a:solidFill>
-                  <a:srgbClr val="1F4D78"/>
-                </a:solidFill>
-                <a:latin typeface="微软雅黑"/>
-                <a:ea typeface="微软雅黑"/>
-                <a:cs typeface="微软雅黑"/>
-              </a:defRPr>
-            </a:pPr>
-            <a:r>
-              <a:rPr sz="2200" b="0">
-                <a:solidFill>
-                  <a:srgbClr val="1F4D78"/>
-                </a:solidFill>
-                <a:latin typeface="微软雅黑"/>
-                <a:ea typeface="微软雅黑"/>
-                <a:cs typeface="微软雅黑"/>
-              </a:rPr>
-              <a:t>输出／失败</a:t>
-            </a:r>
-          </a:p>
-        </p:txBody>
-      </p:sp>
-      <p:sp>
-        <p:nvSpPr>
-          <p:cNvPr id="20" name="content-113">
-            <a:extLst xmlns:a="http://schemas.openxmlformats.org/drawingml/2006/main">
-              <a:ext uri="{FF2B5EF4-FFF2-40B4-BE49-F238E27FC236}">
-                <a16:creationId xmlns:a16="http://schemas.microsoft.com/office/drawing/2014/main" id="{AD9E887A-5F8C-453E-861C-C34B87642374}"/>
-              </a:ext>
-            </a:extLst>
-          </p:cNvPr>
-          <p:cNvSpPr>
-            <a:spLocks xmlns:a="http://schemas.openxmlformats.org/drawingml/2006/main" noGrp="1"/>
-          </p:cNvSpPr>
-          <p:nvPr/>
-        </p:nvSpPr>
-        <p:spPr>
-          <a:xfrm xmlns:a="http://schemas.openxmlformats.org/drawingml/2006/main">
-            <a:off x="609600" y="3286125"/>
-            <a:ext cx="10972800" cy="417195"/>
-          </a:xfrm>
-          <a:prstGeom xmlns:a="http://schemas.openxmlformats.org/drawingml/2006/main" prst="rect">
-            <a:avLst/>
-          </a:prstGeom>
-          <a:noFill xmlns:a="http://schemas.openxmlformats.org/drawingml/2006/main"/>
-          <a:ln xmlns:a="http://schemas.openxmlformats.org/drawingml/2006/main" w="0">
-            <a:noFill/>
-          </a:ln>
-        </p:spPr>
-        <p:txBody>
-          <a:bodyPr xmlns:a="http://schemas.openxmlformats.org/drawingml/2006/main" lIns="0" tIns="0" rIns="0" bIns="0" anchor="t"/>
-          <a:lstStyle xmlns:a="http://schemas.openxmlformats.org/drawingml/2006/main"/>
-          <a:p xmlns:a="http://schemas.openxmlformats.org/drawingml/2006/main">
-            <a:pPr algn="l">
-              <a:lnSpc>
-                <a:spcPct val="118000"/>
-              </a:lnSpc>
-              <a:buNone/>
-              <a:defRPr sz="2300" b="0">
-                <a:solidFill>
-                  <a:srgbClr val="27333D"/>
-                </a:solidFill>
-                <a:latin typeface="微软雅黑"/>
-                <a:ea typeface="微软雅黑"/>
-                <a:cs typeface="微软雅黑"/>
-              </a:defRPr>
-            </a:pPr>
-            <a:r>
-              <a:rPr sz="2300" b="0">
-                <a:solidFill>
-                  <a:srgbClr val="27333D"/>
-                </a:solidFill>
-                <a:latin typeface="微软雅黑"/>
-                <a:ea typeface="微软雅黑"/>
-                <a:cs typeface="微软雅黑"/>
-              </a:rPr>
-              <a:t>改善了哪个科研动作，如何评价？</a:t>
-            </a:r>
-          </a:p>
-        </p:txBody>
-      </p:sp>
-      <p:sp>
-        <p:nvSpPr>
-          <p:cNvPr id="21" name="content-114">
-            <a:extLst xmlns:a="http://schemas.openxmlformats.org/drawingml/2006/main">
-              <a:ext uri="{FF2B5EF4-FFF2-40B4-BE49-F238E27FC236}">
-                <a16:creationId xmlns:a16="http://schemas.microsoft.com/office/drawing/2014/main" id="{D81418C0-CDFC-4A73-BD43-C32AE5410EC8}"/>
-              </a:ext>
-            </a:extLst>
-          </p:cNvPr>
-          <p:cNvSpPr>
-            <a:spLocks xmlns:a="http://schemas.openxmlformats.org/drawingml/2006/main" noGrp="1"/>
-          </p:cNvSpPr>
-          <p:nvPr/>
-        </p:nvSpPr>
-        <p:spPr>
-          <a:xfrm xmlns:a="http://schemas.openxmlformats.org/drawingml/2006/main">
-            <a:off x="609600" y="3865245"/>
-            <a:ext cx="10972800" cy="417195"/>
-          </a:xfrm>
-          <a:prstGeom xmlns:a="http://schemas.openxmlformats.org/drawingml/2006/main" prst="rect">
-            <a:avLst/>
-          </a:prstGeom>
-          <a:noFill xmlns:a="http://schemas.openxmlformats.org/drawingml/2006/main"/>
-          <a:ln xmlns:a="http://schemas.openxmlformats.org/drawingml/2006/main" w="0">
-            <a:noFill/>
-          </a:ln>
-        </p:spPr>
-        <p:txBody>
-          <a:bodyPr xmlns:a="http://schemas.openxmlformats.org/drawingml/2006/main" lIns="0" tIns="0" rIns="0" bIns="0" anchor="t"/>
-          <a:lstStyle xmlns:a="http://schemas.openxmlformats.org/drawingml/2006/main"/>
-          <a:p xmlns:a="http://schemas.openxmlformats.org/drawingml/2006/main">
-            <a:pPr algn="l">
-              <a:lnSpc>
-                <a:spcPct val="118000"/>
-              </a:lnSpc>
-              <a:buNone/>
-              <a:defRPr sz="2300" b="0">
-                <a:solidFill>
-                  <a:srgbClr val="27333D"/>
-                </a:solidFill>
-                <a:latin typeface="微软雅黑"/>
-                <a:ea typeface="微软雅黑"/>
-                <a:cs typeface="微软雅黑"/>
-              </a:defRPr>
-            </a:pPr>
-            <a:r>
-              <a:rPr sz="2300" b="0">
-                <a:solidFill>
-                  <a:srgbClr val="27333D"/>
-                </a:solidFill>
-                <a:latin typeface="微软雅黑"/>
-                <a:ea typeface="微软雅黑"/>
-                <a:cs typeface="微软雅黑"/>
-              </a:rPr>
-              <a:t>哪次运行失败，原因已查明还是仍待查？</a:t>
-            </a:r>
-          </a:p>
-        </p:txBody>
-      </p:sp>
-      <p:sp>
-        <p:nvSpPr>
-          <p:cNvPr id="22" name="content-115">
-            <a:extLst xmlns:a="http://schemas.openxmlformats.org/drawingml/2006/main">
-              <a:ext uri="{FF2B5EF4-FFF2-40B4-BE49-F238E27FC236}">
-                <a16:creationId xmlns:a16="http://schemas.microsoft.com/office/drawing/2014/main" id="{9FACF49F-24F4-430F-A8D8-827859A9D4AC}"/>
-              </a:ext>
-            </a:extLst>
-          </p:cNvPr>
-          <p:cNvSpPr>
-            <a:spLocks xmlns:a="http://schemas.openxmlformats.org/drawingml/2006/main" noGrp="1"/>
-          </p:cNvSpPr>
-          <p:nvPr/>
-        </p:nvSpPr>
-        <p:spPr>
-          <a:xfrm xmlns:a="http://schemas.openxmlformats.org/drawingml/2006/main">
-            <a:off x="609600" y="4444365"/>
-            <a:ext cx="10972800" cy="417195"/>
-          </a:xfrm>
-          <a:prstGeom xmlns:a="http://schemas.openxmlformats.org/drawingml/2006/main" prst="rect">
-            <a:avLst/>
-          </a:prstGeom>
-          <a:noFill xmlns:a="http://schemas.openxmlformats.org/drawingml/2006/main"/>
-          <a:ln xmlns:a="http://schemas.openxmlformats.org/drawingml/2006/main" w="0">
-            <a:noFill/>
-          </a:ln>
-        </p:spPr>
-        <p:txBody>
-          <a:bodyPr xmlns:a="http://schemas.openxmlformats.org/drawingml/2006/main" lIns="0" tIns="0" rIns="0" bIns="0" anchor="t"/>
-          <a:lstStyle xmlns:a="http://schemas.openxmlformats.org/drawingml/2006/main"/>
-          <a:p xmlns:a="http://schemas.openxmlformats.org/drawingml/2006/main">
-            <a:pPr algn="l">
-              <a:lnSpc>
-                <a:spcPct val="118000"/>
-              </a:lnSpc>
-              <a:buNone/>
-              <a:defRPr sz="2300" b="0">
-                <a:solidFill>
-                  <a:srgbClr val="27333D"/>
-                </a:solidFill>
-                <a:latin typeface="微软雅黑"/>
-                <a:ea typeface="微软雅黑"/>
-                <a:cs typeface="微软雅黑"/>
-              </a:defRPr>
-            </a:pPr>
-            <a:r>
-              <a:rPr sz="2300" b="0">
-                <a:solidFill>
-                  <a:srgbClr val="27333D"/>
-                </a:solidFill>
-                <a:latin typeface="微软雅黑"/>
-                <a:ea typeface="微软雅黑"/>
-                <a:cs typeface="微软雅黑"/>
-              </a:rPr>
-              <a:t>修复了什么，哪些边界仍保留？</a:t>
-            </a:r>
-          </a:p>
-        </p:txBody>
-      </p:sp>
-      <p:sp>
-        <p:nvSpPr>
-          <p:cNvPr id="23" name="content-116">
-            <a:extLst xmlns:a="http://schemas.openxmlformats.org/drawingml/2006/main">
-              <a:ext uri="{FF2B5EF4-FFF2-40B4-BE49-F238E27FC236}">
-                <a16:creationId xmlns:a16="http://schemas.microsoft.com/office/drawing/2014/main" id="{91224ACA-6845-4B2B-96C5-C0E76356178C}"/>
-              </a:ext>
-            </a:extLst>
-          </p:cNvPr>
-          <p:cNvSpPr>
-            <a:spLocks xmlns:a="http://schemas.openxmlformats.org/drawingml/2006/main" noGrp="1"/>
-          </p:cNvSpPr>
-          <p:nvPr/>
-        </p:nvSpPr>
-        <p:spPr>
-          <a:xfrm xmlns:a="http://schemas.openxmlformats.org/drawingml/2006/main">
-            <a:off x="609600" y="5023485"/>
-            <a:ext cx="10972800" cy="417195"/>
-          </a:xfrm>
-          <a:prstGeom xmlns:a="http://schemas.openxmlformats.org/drawingml/2006/main" prst="rect">
-            <a:avLst/>
-          </a:prstGeom>
-          <a:noFill xmlns:a="http://schemas.openxmlformats.org/drawingml/2006/main"/>
-          <a:ln xmlns:a="http://schemas.openxmlformats.org/drawingml/2006/main" w="0">
-            <a:noFill/>
-          </a:ln>
-        </p:spPr>
-        <p:txBody>
-          <a:bodyPr xmlns:a="http://schemas.openxmlformats.org/drawingml/2006/main" lIns="0" tIns="0" rIns="0" bIns="0" anchor="t"/>
-          <a:lstStyle xmlns:a="http://schemas.openxmlformats.org/drawingml/2006/main"/>
-          <a:p xmlns:a="http://schemas.openxmlformats.org/drawingml/2006/main">
-            <a:pPr algn="l">
-              <a:lnSpc>
-                <a:spcPct val="118000"/>
-              </a:lnSpc>
-              <a:buNone/>
-              <a:defRPr sz="2300" b="0">
-                <a:solidFill>
-                  <a:srgbClr val="1F4D78"/>
-                </a:solidFill>
-                <a:latin typeface="微软雅黑"/>
-                <a:ea typeface="微软雅黑"/>
-                <a:cs typeface="微软雅黑"/>
-              </a:defRPr>
-            </a:pPr>
-            <a:r>
-              <a:rPr sz="2300" b="0">
-                <a:solidFill>
-                  <a:srgbClr val="1F4D78"/>
-                </a:solidFill>
-                <a:latin typeface="微软雅黑"/>
-                <a:ea typeface="微软雅黑"/>
-                <a:cs typeface="微软雅黑"/>
-              </a:rPr>
-              <a:t>哪个判断不能自动化？</a:t>
+              <a:t>7</a:t>
             </a:r>
           </a:p>
         </p:txBody>
